--- a/praesentationen/input-04-azure-compute.pptx
+++ b/praesentationen/input-04-azure-compute.pptx
@@ -116,7 +116,7 @@
   <p:extLst>
     <p:ext uri="{521415D9-36F7-43E2-AB2F-B90AF26B5E84}">
       <p14:sectionLst xmlns:p14="http://schemas.microsoft.com/office/powerpoint/2010/main">
-        <p14:section name="Compute" id="{2683b75b-6694-0bab-225d-f7172e61c68d}">
+        <p14:section name="Compute" id="{61d8f2a1-6231-9613-749c-899239c70230}">
           <p14:sldIdLst>
             <p14:sldId id="256"/>
             <p14:sldId id="257"/>
@@ -2939,7 +2939,7 @@
                             <a:srgbClr val="FFFFFF"/>
                           </a:solidFill>
                         </a:rPr>
-                        <a:t>Tag 1 (VirtualBox)</a:t>
+                        <a:t>Tag 1 (Multipass)</a:t>
                       </a:r>
                       <a:endParaRPr lang="en-US" sz="1700" dirty="0"/>
                     </a:p>
@@ -3124,7 +3124,7 @@
                             <a:srgbClr val="27303A"/>
                           </a:solidFill>
                         </a:rPr>
-                        <a:t>VM-Einstellungen</a:t>
+                        <a:t>--cpus, --memory</a:t>
                       </a:r>
                       <a:endParaRPr lang="en-US" sz="1700" dirty="0"/>
                     </a:p>
@@ -3309,7 +3309,7 @@
                             <a:srgbClr val="27303A"/>
                           </a:solidFill>
                         </a:rPr>
-                        <a:t>.vdi-Datei</a:t>
+                        <a:t>--disk</a:t>
                       </a:r>
                       <a:endParaRPr lang="en-US" sz="1700" dirty="0"/>
                     </a:p>
@@ -3494,7 +3494,7 @@
                             <a:srgbClr val="27303A"/>
                           </a:solidFill>
                         </a:rPr>
-                        <a:t>Netzwerkadapter</a:t>
+                        <a:t>IP in multipass list</a:t>
                       </a:r>
                       <a:endParaRPr lang="en-US" sz="1700" dirty="0"/>
                     </a:p>
@@ -3679,7 +3679,7 @@
                             <a:srgbClr val="27303A"/>
                           </a:solidFill>
                         </a:rPr>
-                        <a:t>NAT-Netz 10.0.2.0/24</a:t>
+                        <a:t>kleines Netz von Hyper-V</a:t>
                       </a:r>
                       <a:endParaRPr lang="en-US" sz="1700" dirty="0"/>
                     </a:p>
@@ -3864,7 +3864,7 @@
                             <a:srgbClr val="27303A"/>
                           </a:solidFill>
                         </a:rPr>
-                        <a:t>Portweiterleitung</a:t>
+                        <a:t>gab es nicht</a:t>
                       </a:r>
                       <a:endParaRPr lang="en-US" sz="1700" dirty="0"/>
                     </a:p>
@@ -4049,7 +4049,7 @@
                             <a:srgbClr val="27303A"/>
                           </a:solidFill>
                         </a:rPr>
-                        <a:t>Portweiterleitung, nur feiner</a:t>
+                        <a:t>gab es nicht</a:t>
                       </a:r>
                       <a:endParaRPr lang="en-US" sz="1700" dirty="0"/>
                     </a:p>

--- a/praesentationen/input-04-azure-compute.pptx
+++ b/praesentationen/input-04-azure-compute.pptx
@@ -116,7 +116,7 @@
   <p:extLst>
     <p:ext uri="{521415D9-36F7-43E2-AB2F-B90AF26B5E84}">
       <p14:sectionLst xmlns:p14="http://schemas.microsoft.com/office/powerpoint/2010/main">
-        <p14:section name="Compute" id="{61d8f2a1-6231-9613-749c-899239c70230}">
+        <p14:section name="Compute" id="{daa2b794-15c7-2ccc-c2a8-a7ebef330e2b}">
           <p14:sldIdLst>
             <p14:sldId id="256"/>
             <p14:sldId id="257"/>

--- a/praesentationen/input-04-azure-compute.pptx
+++ b/praesentationen/input-04-azure-compute.pptx
@@ -116,7 +116,7 @@
   <p:extLst>
     <p:ext uri="{521415D9-36F7-43E2-AB2F-B90AF26B5E84}">
       <p14:sectionLst xmlns:p14="http://schemas.microsoft.com/office/powerpoint/2010/main">
-        <p14:section name="Compute" id="{daa2b794-15c7-2ccc-c2a8-a7ebef330e2b}">
+        <p14:section name="Compute" id="{cf14d45a-52cf-a4f9-4187-a166cae69565}">
           <p14:sldIdLst>
             <p14:sldId id="256"/>
             <p14:sldId id="257"/>
@@ -1404,7 +1404,7 @@
     <p:bg>
       <p:bgPr>
         <a:solidFill>
-          <a:srgbClr val="27303A"/>
+          <a:srgbClr val="FFFFFF"/>
         </a:solidFill>
       </p:bgPr>
     </p:bg>
@@ -1424,7 +1424,7 @@
       </p:grpSpPr>
       <p:pic>
         <p:nvPicPr>
-          <p:cNvPr id="2" name="Image 0" descr="C:\Users\Thanam\AppData\Local\Temp\claude\c--Projekt-Trainings-azure-basics-training\a9e0bf4e-0d08-4082-a38a-5b8886538508\scratchpad\pptx\assets\logo-hell.png">    </p:cNvPr>
+          <p:cNvPr id="2" name="Image 0" descr="C:\Users\Thanam\AppData\Local\Temp\claude\c--Projekt-Trainings-azure-basics-training\a7a6b8eb-22f3-4b42-aecc-5af05d1502b1\scratchpad\folien\assets\logo-dunkel.png">    </p:cNvPr>
           <p:cNvPicPr>
             <a:picLocks noChangeAspect="1"/>
           </p:cNvPicPr>
@@ -1448,7 +1448,7 @@
       </p:pic>
       <p:pic>
         <p:nvPicPr>
-          <p:cNvPr id="3" name="Image 1" descr="C:\Users\Thanam\AppData\Local\Temp\claude\c--Projekt-Trainings-azure-basics-training\a9e0bf4e-0d08-4082-a38a-5b8886538508\scratchpad\pptx\assets\wolke.png">    </p:cNvPr>
+          <p:cNvPr id="3" name="Image 1" descr="C:\Users\Thanam\AppData\Local\Temp\claude\c--Projekt-Trainings-azure-basics-training\a7a6b8eb-22f3-4b42-aecc-5af05d1502b1\scratchpad\folien\assets\wolke.png">    </p:cNvPr>
           <p:cNvPicPr>
             <a:picLocks noChangeAspect="1"/>
           </p:cNvPicPr>
@@ -1496,7 +1496,7 @@
               <a:buNone/>
               <a:defRPr lang="en-US" sz="4400" b="1" dirty="0">
                 <a:solidFill>
-                  <a:srgbClr val="FFFFFF"/>
+                  <a:srgbClr val="27303A"/>
                 </a:solidFill>
               </a:defRPr>
             </a:lvl1pPr>
@@ -1535,7 +1535,7 @@
               <a:buNone/>
               <a:defRPr lang="en-US" sz="2000" dirty="0">
                 <a:solidFill>
-                  <a:srgbClr val="DEE2FB"/>
+                  <a:srgbClr val="006FAD"/>
                 </a:solidFill>
               </a:defRPr>
             </a:lvl1pPr>
@@ -1575,7 +1575,7 @@
             <a:r>
               <a:rPr lang="en-US" sz="1200" dirty="0">
                 <a:solidFill>
-                  <a:srgbClr val="DEE2FB"/>
+                  <a:srgbClr val="6F6F6F"/>
                 </a:solidFill>
               </a:rPr>
               <a:t>Kanton Zürich · ICT-Grundbildung · PAT Cloud Solutions</a:t>
@@ -1598,7 +1598,7 @@
     <p:bg>
       <p:bgPr>
         <a:solidFill>
-          <a:srgbClr val="006FAD"/>
+          <a:srgbClr val="F7F7F7"/>
         </a:solidFill>
       </p:bgPr>
     </p:bg>
@@ -1618,7 +1618,7 @@
       </p:grpSpPr>
       <p:pic>
         <p:nvPicPr>
-          <p:cNvPr id="2" name="Image 0" descr="C:\Users\Thanam\AppData\Local\Temp\claude\c--Projekt-Trainings-azure-basics-training\a9e0bf4e-0d08-4082-a38a-5b8886538508\scratchpad\pptx\assets\wolke.png">    </p:cNvPr>
+          <p:cNvPr id="2" name="Image 0" descr="C:\Users\Thanam\AppData\Local\Temp\claude\c--Projekt-Trainings-azure-basics-training\a7a6b8eb-22f3-4b42-aecc-5af05d1502b1\scratchpad\folien\assets\wolke.png">    </p:cNvPr>
           <p:cNvPicPr>
             <a:picLocks noChangeAspect="1"/>
           </p:cNvPicPr>
@@ -1642,7 +1642,7 @@
       </p:pic>
       <p:pic>
         <p:nvPicPr>
-          <p:cNvPr id="3" name="Image 1" descr="C:\Users\Thanam\AppData\Local\Temp\claude\c--Projekt-Trainings-azure-basics-training\a9e0bf4e-0d08-4082-a38a-5b8886538508\scratchpad\pptx\assets\logo-hell.png">    </p:cNvPr>
+          <p:cNvPr id="3" name="Image 1" descr="C:\Users\Thanam\AppData\Local\Temp\claude\c--Projekt-Trainings-azure-basics-training\a7a6b8eb-22f3-4b42-aecc-5af05d1502b1\scratchpad\folien\assets\logo-dunkel.png">    </p:cNvPr>
           <p:cNvPicPr>
             <a:picLocks noChangeAspect="1"/>
           </p:cNvPicPr>
@@ -1690,7 +1690,7 @@
               <a:buNone/>
               <a:defRPr lang="en-US" sz="4000" b="1" dirty="0">
                 <a:solidFill>
-                  <a:srgbClr val="FFFFFF"/>
+                  <a:srgbClr val="27303A"/>
                 </a:solidFill>
               </a:defRPr>
             </a:lvl1pPr>
@@ -1729,7 +1729,7 @@
               <a:buNone/>
               <a:defRPr lang="en-US" sz="2000" dirty="0">
                 <a:solidFill>
-                  <a:srgbClr val="DEE2FB"/>
+                  <a:srgbClr val="006FAD"/>
                 </a:solidFill>
               </a:defRPr>
             </a:lvl1pPr>
@@ -1776,7 +1776,7 @@
       </p:grpSpPr>
       <p:pic>
         <p:nvPicPr>
-          <p:cNvPr id="2" name="Image 0" descr="C:\Users\Thanam\AppData\Local\Temp\claude\c--Projekt-Trainings-azure-basics-training\a9e0bf4e-0d08-4082-a38a-5b8886538508\scratchpad\pptx\assets\logo-dunkel.png">    </p:cNvPr>
+          <p:cNvPr id="2" name="Image 0" descr="C:\Users\Thanam\AppData\Local\Temp\claude\c--Projekt-Trainings-azure-basics-training\a7a6b8eb-22f3-4b42-aecc-5af05d1502b1\scratchpad\folien\assets\logo-dunkel.png">    </p:cNvPr>
           <p:cNvPicPr>
             <a:picLocks noChangeAspect="1"/>
           </p:cNvPicPr>
@@ -1932,7 +1932,7 @@
     <p:bg>
       <p:bgPr>
         <a:solidFill>
-          <a:srgbClr val="27303A"/>
+          <a:srgbClr val="FFFFFF"/>
         </a:solidFill>
       </p:bgPr>
     </p:bg>
@@ -1952,7 +1952,7 @@
       </p:grpSpPr>
       <p:pic>
         <p:nvPicPr>
-          <p:cNvPr id="2" name="Image 0" descr="C:\Users\Thanam\AppData\Local\Temp\claude\c--Projekt-Trainings-azure-basics-training\a9e0bf4e-0d08-4082-a38a-5b8886538508\scratchpad\pptx\assets\logo-hell.png">    </p:cNvPr>
+          <p:cNvPr id="2" name="Image 0" descr="C:\Users\Thanam\AppData\Local\Temp\claude\c--Projekt-Trainings-azure-basics-training\a7a6b8eb-22f3-4b42-aecc-5af05d1502b1\scratchpad\folien\assets\logo-dunkel.png">    </p:cNvPr>
           <p:cNvPicPr>
             <a:picLocks noChangeAspect="1"/>
           </p:cNvPicPr>
@@ -2000,7 +2000,7 @@
               <a:buNone/>
               <a:defRPr lang="en-US" sz="4000" b="1" dirty="0">
                 <a:solidFill>
-                  <a:srgbClr val="FFFFFF"/>
+                  <a:srgbClr val="27303A"/>
                 </a:solidFill>
               </a:defRPr>
             </a:lvl1pPr>
@@ -2039,7 +2039,7 @@
               <a:buNone/>
               <a:defRPr lang="en-US" sz="2000" dirty="0">
                 <a:solidFill>
-                  <a:srgbClr val="DEE2FB"/>
+                  <a:srgbClr val="006FAD"/>
                 </a:solidFill>
               </a:defRPr>
             </a:lvl1pPr>
@@ -2432,7 +2432,7 @@
             <a:r>
               <a:rPr lang="en-US" sz="4400" b="1" dirty="0">
                 <a:solidFill>
-                  <a:srgbClr val="FFFFFF"/>
+                  <a:srgbClr val="27303A"/>
                 </a:solidFill>
               </a:rPr>
               <a:t>Azure Compute: virtuelle Maschinen</a:t>
@@ -2470,7 +2470,7 @@
             <a:r>
               <a:rPr lang="en-US" sz="2000" dirty="0">
                 <a:solidFill>
-                  <a:srgbClr val="DEE2FB"/>
+                  <a:srgbClr val="006FAD"/>
                 </a:solidFill>
               </a:rPr>
               <a:t>Input 1 · Tag 3</a:t>
@@ -2533,7 +2533,7 @@
             <a:r>
               <a:rPr lang="en-US" sz="4000" b="1" dirty="0">
                 <a:solidFill>
-                  <a:srgbClr val="FFFFFF"/>
+                  <a:srgbClr val="27303A"/>
                 </a:solidFill>
               </a:rPr>
               <a:t>Jetzt du</a:t>
@@ -2571,7 +2571,7 @@
             <a:r>
               <a:rPr lang="en-US" sz="2000" dirty="0">
                 <a:solidFill>
-                  <a:srgbClr val="DEE2FB"/>
+                  <a:srgbClr val="006FAD"/>
                 </a:solidFill>
               </a:rPr>
               <a:t>Auftrag 3.1: Linux-VM im Portal erstellen und per SSH verbinden</a:t>
@@ -7183,7 +7183,7 @@
       </p:sp>
       <p:pic>
         <p:nvPicPr>
-          <p:cNvPr id="6" name="icon-FaQuestionCircle" descr="C:\Users\Thanam\AppData\Local\Temp\claude\c--Projekt-Trainings-azure-basics-training\a9e0bf4e-0d08-4082-a38a-5b8886538508\scratchpad\pptx\assets\icons\FaQuestionCircle.png">    </p:cNvPr>
+          <p:cNvPr id="6" name="icon-FaQuestionCircle" descr="C:\Users\Thanam\AppData\Local\Temp\claude\c--Projekt-Trainings-azure-basics-training\a7a6b8eb-22f3-4b42-aecc-5af05d1502b1\scratchpad\folien\assets\icons\FaQuestionCircle.png">    </p:cNvPr>
           <p:cNvPicPr>
             <a:picLocks noChangeAspect="1"/>
           </p:cNvPicPr>
@@ -7336,7 +7336,7 @@
       </p:sp>
       <p:pic>
         <p:nvPicPr>
-          <p:cNvPr id="11" name="icon-FaQuestionCircle" descr="C:\Users\Thanam\AppData\Local\Temp\claude\c--Projekt-Trainings-azure-basics-training\a9e0bf4e-0d08-4082-a38a-5b8886538508\scratchpad\pptx\assets\icons\FaQuestionCircle.png">    </p:cNvPr>
+          <p:cNvPr id="11" name="icon-FaQuestionCircle" descr="C:\Users\Thanam\AppData\Local\Temp\claude\c--Projekt-Trainings-azure-basics-training\a7a6b8eb-22f3-4b42-aecc-5af05d1502b1\scratchpad\folien\assets\icons\FaQuestionCircle.png">    </p:cNvPr>
           <p:cNvPicPr>
             <a:picLocks noChangeAspect="1"/>
           </p:cNvPicPr>
@@ -7489,7 +7489,7 @@
       </p:sp>
       <p:pic>
         <p:nvPicPr>
-          <p:cNvPr id="16" name="icon-FaQuestionCircle" descr="C:\Users\Thanam\AppData\Local\Temp\claude\c--Projekt-Trainings-azure-basics-training\a9e0bf4e-0d08-4082-a38a-5b8886538508\scratchpad\pptx\assets\icons\FaQuestionCircle.png">    </p:cNvPr>
+          <p:cNvPr id="16" name="icon-FaQuestionCircle" descr="C:\Users\Thanam\AppData\Local\Temp\claude\c--Projekt-Trainings-azure-basics-training\a7a6b8eb-22f3-4b42-aecc-5af05d1502b1\scratchpad\folien\assets\icons\FaQuestionCircle.png">    </p:cNvPr>
           <p:cNvPicPr>
             <a:picLocks noChangeAspect="1"/>
           </p:cNvPicPr>
@@ -7723,7 +7723,7 @@
       </p:sp>
       <p:pic>
         <p:nvPicPr>
-          <p:cNvPr id="4" name="icon-FaBook" descr="C:\Users\Thanam\AppData\Local\Temp\claude\c--Projekt-Trainings-azure-basics-training\a9e0bf4e-0d08-4082-a38a-5b8886538508\scratchpad\pptx\assets\icons\FaBook.png">    </p:cNvPr>
+          <p:cNvPr id="4" name="icon-FaBook" descr="C:\Users\Thanam\AppData\Local\Temp\claude\c--Projekt-Trainings-azure-basics-training\a7a6b8eb-22f3-4b42-aecc-5af05d1502b1\scratchpad\folien\assets\icons\FaBook.png">    </p:cNvPr>
           <p:cNvPicPr>
             <a:picLocks noChangeAspect="1"/>
           </p:cNvPicPr>
@@ -7822,7 +7822,7 @@
       </p:sp>
       <p:pic>
         <p:nvPicPr>
-          <p:cNvPr id="7" name="icon-FaGraduationCap" descr="C:\Users\Thanam\AppData\Local\Temp\claude\c--Projekt-Trainings-azure-basics-training\a9e0bf4e-0d08-4082-a38a-5b8886538508\scratchpad\pptx\assets\icons\FaGraduationCap.png">    </p:cNvPr>
+          <p:cNvPr id="7" name="icon-FaGraduationCap" descr="C:\Users\Thanam\AppData\Local\Temp\claude\c--Projekt-Trainings-azure-basics-training\a7a6b8eb-22f3-4b42-aecc-5af05d1502b1\scratchpad\folien\assets\icons\FaGraduationCap.png">    </p:cNvPr>
           <p:cNvPicPr>
             <a:picLocks noChangeAspect="1"/>
           </p:cNvPicPr>

--- a/praesentationen/input-04-azure-compute.pptx
+++ b/praesentationen/input-04-azure-compute.pptx
@@ -15,9 +15,10 @@
     <p:sldId id="263" r:id="rId9"/>
     <p:sldId id="264" r:id="rId10"/>
     <p:sldId id="265" r:id="rId11"/>
+    <p:sldId id="266" r:id="rId12"/>
   </p:sldIdLst>
   <p:notesMasterIdLst>
-    <p:notesMasterId r:id="rId12"/>
+    <p:notesMasterId r:id="rId13"/>
   </p:notesMasterIdLst>
   <p:sldSz cx="12192000" cy="6858000"/>
   <p:notesSz cx="6858000" cy="12192000"/>
@@ -116,7 +117,7 @@
   <p:extLst>
     <p:ext uri="{521415D9-36F7-43E2-AB2F-B90AF26B5E84}">
       <p14:sectionLst xmlns:p14="http://schemas.microsoft.com/office/powerpoint/2010/main">
-        <p14:section name="Compute" id="{cf14d45a-52cf-a4f9-4187-a166cae69565}">
+        <p14:section name="Compute" id="{c31badb4-a4d4-49b1-500d-33628b90300e}">
           <p14:sldIdLst>
             <p14:sldId id="256"/>
             <p14:sldId id="257"/>
@@ -128,6 +129,7 @@
             <p14:sldId id="263"/>
             <p14:sldId id="264"/>
             <p14:sldId id="265"/>
+            <p14:sldId id="266"/>
           </p14:sldIdLst>
         </p14:section>
       </p14:sectionLst>
@@ -664,6 +666,94 @@
 </p:notes>
 </file>
 
+<file path=ppt/notesSlides/notesSlide11.xml><?xml version="1.0" encoding="utf-8"?>
+<p:notes xmlns:a="http://schemas.openxmlformats.org/drawingml/2006/main" xmlns:r="http://schemas.openxmlformats.org/officeDocument/2006/relationships" xmlns:p="http://schemas.openxmlformats.org/presentationml/2006/main">
+  <p:cSld>
+    <p:spTree>
+      <p:nvGrpSpPr>
+        <p:cNvPr id="1" name=""/>
+        <p:cNvGrpSpPr/>
+        <p:nvPr/>
+      </p:nvGrpSpPr>
+      <p:grpSpPr>
+        <a:xfrm>
+          <a:off x="0" y="0"/>
+          <a:ext cx="0" cy="0"/>
+          <a:chOff x="0" y="0"/>
+          <a:chExt cx="0" cy="0"/>
+        </a:xfrm>
+      </p:grpSpPr>
+      <p:sp>
+        <p:nvSpPr>
+          <p:cNvPr id="2" name="Slide Image Placeholder 1"/>
+          <p:cNvSpPr>
+            <a:spLocks noGrp="1" noRot="1" noChangeAspect="1"/>
+          </p:cNvSpPr>
+          <p:nvPr>
+            <p:ph type="sldImg"/>
+          </p:nvPr>
+        </p:nvSpPr>
+        <p:spPr/>
+      </p:sp>
+      <p:sp>
+        <p:nvSpPr>
+          <p:cNvPr id="3" name="Notes Placeholder 2"/>
+          <p:cNvSpPr>
+            <a:spLocks noGrp="1"/>
+          </p:cNvSpPr>
+          <p:nvPr>
+            <p:ph type="body" idx="1"/>
+          </p:nvPr>
+        </p:nvSpPr>
+        <p:spPr/>
+        <p:txBody>
+          <a:bodyPr/>
+          <a:lstStyle/>
+          <a:p>
+            <a:r>
+              <a:rPr lang="en-US" dirty="0"/>
+              <a:t/>
+            </a:r>
+            <a:endParaRPr lang="en-US" dirty="0"/>
+          </a:p>
+        </p:txBody>
+      </p:sp>
+      <p:sp>
+        <p:nvSpPr>
+          <p:cNvPr id="4" name="Slide Number Placeholder 3"/>
+          <p:cNvSpPr>
+            <a:spLocks noGrp="1"/>
+          </p:cNvSpPr>
+          <p:nvPr>
+            <p:ph type="sldNum" sz="quarter" idx="10"/>
+          </p:nvPr>
+        </p:nvSpPr>
+        <p:spPr/>
+        <p:txBody>
+          <a:bodyPr/>
+          <a:lstStyle/>
+          <a:p>
+            <a:fld id="{F7021451-1387-4CA6-816F-3879F97B5CBC}" type="slidenum">
+              <a:rPr lang="en-US"/>
+              <a:t>11</a:t>
+            </a:fld>
+            <a:endParaRPr lang="en-US"/>
+          </a:p>
+        </p:txBody>
+      </p:sp>
+    </p:spTree>
+    <p:extLst>
+      <p:ext uri="{BB962C8B-B14F-4D97-AF65-F5344CB8AC3E}">
+        <p14:creationId xmlns:p14="http://schemas.microsoft.com/office/powerpoint/2010/main" val="1024086991"/>
+      </p:ext>
+    </p:extLst>
+  </p:cSld>
+  <p:clrMapOvr>
+    <a:masterClrMapping/>
+  </p:clrMapOvr>
+</p:notes>
+</file>
+
 <file path=ppt/notesSlides/notesSlide2.xml><?xml version="1.0" encoding="utf-8"?>
 <p:notes xmlns:a="http://schemas.openxmlformats.org/drawingml/2006/main" xmlns:r="http://schemas.openxmlformats.org/officeDocument/2006/relationships" xmlns:p="http://schemas.openxmlformats.org/presentationml/2006/main">
   <p:cSld>
@@ -1062,7 +1152,7 @@
           <a:p>
             <a:r>
               <a:rPr lang="en-US" dirty="0"/>
-              <a:t/>
+              <a:t>Bekannt von Tag 1 (vm1). In Azure gleich: Der öffentliche Schlüssel kommt beim Erstellen der VM in authorized_keys, der private bleibt auf dem Laptop. Frage an die Klasse: Welche Datei fügst du im Portal ein?</a:t>
             </a:r>
             <a:endParaRPr lang="en-US" dirty="0"/>
           </a:p>
@@ -1238,7 +1328,7 @@
           <a:p>
             <a:r>
               <a:rPr lang="en-US" dirty="0"/>
-              <a:t>VM, Disk, NIC, VNet, öffentliche IP, NSG. Ja. Zwei vCPUs.</a:t>
+              <a:t/>
             </a:r>
             <a:endParaRPr lang="en-US" dirty="0"/>
           </a:p>
@@ -1326,7 +1416,7 @@
           <a:p>
             <a:r>
               <a:rPr lang="en-US" dirty="0"/>
-              <a:t/>
+              <a:t>VM, Disk, NIC, VNet, öffentliche IP, NSG. Ja. Zwei vCPUs.</a:t>
             </a:r>
             <a:endParaRPr lang="en-US" dirty="0"/>
           </a:p>
@@ -1424,7 +1514,7 @@
       </p:grpSpPr>
       <p:pic>
         <p:nvPicPr>
-          <p:cNvPr id="2" name="Image 0" descr="C:\Users\Thanam\AppData\Local\Temp\claude\c--Projekt-Trainings-azure-basics-training\a7a6b8eb-22f3-4b42-aecc-5af05d1502b1\scratchpad\folien\assets\logo-dunkel.png">    </p:cNvPr>
+          <p:cNvPr id="2" name="Image 0" descr="C:\Users\Thanam\AppData\Local\Temp\claude\c--Projekt-Trainings-azure-basics-training\d01384da-f513-40b3-985e-441cf1c86f9e\scratchpad\arbeit\assets\logo-dunkel.png">    </p:cNvPr>
           <p:cNvPicPr>
             <a:picLocks noChangeAspect="1"/>
           </p:cNvPicPr>
@@ -1448,7 +1538,7 @@
       </p:pic>
       <p:pic>
         <p:nvPicPr>
-          <p:cNvPr id="3" name="Image 1" descr="C:\Users\Thanam\AppData\Local\Temp\claude\c--Projekt-Trainings-azure-basics-training\a7a6b8eb-22f3-4b42-aecc-5af05d1502b1\scratchpad\folien\assets\wolke.png">    </p:cNvPr>
+          <p:cNvPr id="3" name="Image 1" descr="C:\Users\Thanam\AppData\Local\Temp\claude\c--Projekt-Trainings-azure-basics-training\d01384da-f513-40b3-985e-441cf1c86f9e\scratchpad\arbeit\assets\wolke.png">    </p:cNvPr>
           <p:cNvPicPr>
             <a:picLocks noChangeAspect="1"/>
           </p:cNvPicPr>
@@ -1618,7 +1708,7 @@
       </p:grpSpPr>
       <p:pic>
         <p:nvPicPr>
-          <p:cNvPr id="2" name="Image 0" descr="C:\Users\Thanam\AppData\Local\Temp\claude\c--Projekt-Trainings-azure-basics-training\a7a6b8eb-22f3-4b42-aecc-5af05d1502b1\scratchpad\folien\assets\wolke.png">    </p:cNvPr>
+          <p:cNvPr id="2" name="Image 0" descr="C:\Users\Thanam\AppData\Local\Temp\claude\c--Projekt-Trainings-azure-basics-training\d01384da-f513-40b3-985e-441cf1c86f9e\scratchpad\arbeit\assets\wolke.png">    </p:cNvPr>
           <p:cNvPicPr>
             <a:picLocks noChangeAspect="1"/>
           </p:cNvPicPr>
@@ -1642,7 +1732,7 @@
       </p:pic>
       <p:pic>
         <p:nvPicPr>
-          <p:cNvPr id="3" name="Image 1" descr="C:\Users\Thanam\AppData\Local\Temp\claude\c--Projekt-Trainings-azure-basics-training\a7a6b8eb-22f3-4b42-aecc-5af05d1502b1\scratchpad\folien\assets\logo-dunkel.png">    </p:cNvPr>
+          <p:cNvPr id="3" name="Image 1" descr="C:\Users\Thanam\AppData\Local\Temp\claude\c--Projekt-Trainings-azure-basics-training\d01384da-f513-40b3-985e-441cf1c86f9e\scratchpad\arbeit\assets\logo-dunkel.png">    </p:cNvPr>
           <p:cNvPicPr>
             <a:picLocks noChangeAspect="1"/>
           </p:cNvPicPr>
@@ -1776,7 +1866,7 @@
       </p:grpSpPr>
       <p:pic>
         <p:nvPicPr>
-          <p:cNvPr id="2" name="Image 0" descr="C:\Users\Thanam\AppData\Local\Temp\claude\c--Projekt-Trainings-azure-basics-training\a7a6b8eb-22f3-4b42-aecc-5af05d1502b1\scratchpad\folien\assets\logo-dunkel.png">    </p:cNvPr>
+          <p:cNvPr id="2" name="Image 0" descr="C:\Users\Thanam\AppData\Local\Temp\claude\c--Projekt-Trainings-azure-basics-training\d01384da-f513-40b3-985e-441cf1c86f9e\scratchpad\arbeit\assets\logo-dunkel.png">    </p:cNvPr>
           <p:cNvPicPr>
             <a:picLocks noChangeAspect="1"/>
           </p:cNvPicPr>
@@ -1952,7 +2042,7 @@
       </p:grpSpPr>
       <p:pic>
         <p:nvPicPr>
-          <p:cNvPr id="2" name="Image 0" descr="C:\Users\Thanam\AppData\Local\Temp\claude\c--Projekt-Trainings-azure-basics-training\a7a6b8eb-22f3-4b42-aecc-5af05d1502b1\scratchpad\folien\assets\logo-dunkel.png">    </p:cNvPr>
+          <p:cNvPr id="2" name="Image 0" descr="C:\Users\Thanam\AppData\Local\Temp\claude\c--Projekt-Trainings-azure-basics-training\d01384da-f513-40b3-985e-441cf1c86f9e\scratchpad\arbeit\assets\logo-dunkel.png">    </p:cNvPr>
           <p:cNvPicPr>
             <a:picLocks noChangeAspect="1"/>
           </p:cNvPicPr>
@@ -2506,6 +2596,312 @@
       </p:grpSpPr>
       <p:sp>
         <p:nvSpPr>
+          <p:cNvPr id="2" name="Text 1"/>
+          <p:cNvSpPr/>
+          <p:nvPr>
+            <p:ph idx="102" type="title" hasCustomPrompt="1"/>
+          </p:nvPr>
+        </p:nvSpPr>
+        <p:spPr>
+          <a:xfrm>
+            <a:off x="548640" y="320040"/>
+            <a:ext cx="11094415" cy="822960"/>
+          </a:xfrm>
+          <a:prstGeom prst="rect">
+            <a:avLst/>
+          </a:prstGeom>
+          <a:noFill/>
+          <a:ln/>
+        </p:spPr>
+        <p:txBody>
+          <a:bodyPr wrap="square" lIns="0" tIns="0" rIns="0" bIns="0" rtlCol="0" anchor="ctr"/>
+          <a:lstStyle/>
+          <a:p>
+            <a:pPr algn="l" indent="0" marL="0">
+              <a:buNone/>
+            </a:pPr>
+            <a:r>
+              <a:rPr lang="en-US" sz="3400" b="1" dirty="0">
+                <a:solidFill>
+                  <a:srgbClr val="27303A"/>
+                </a:solidFill>
+              </a:rPr>
+              <a:t>Zum Nachlesen</a:t>
+            </a:r>
+            <a:endParaRPr lang="en-US" sz="3400" dirty="0"/>
+          </a:p>
+        </p:txBody>
+      </p:sp>
+      <p:sp>
+        <p:nvSpPr>
+          <p:cNvPr id="3" name="icon-kreis-FaBook"/>
+          <p:cNvSpPr/>
+          <p:nvPr/>
+        </p:nvSpPr>
+        <p:spPr>
+          <a:xfrm>
+            <a:off x="548640" y="2926080"/>
+            <a:ext cx="548640" cy="548640"/>
+          </a:xfrm>
+          <a:prstGeom prst="ellipse">
+            <a:avLst/>
+          </a:prstGeom>
+          <a:solidFill>
+            <a:srgbClr val="006FAD"/>
+          </a:solidFill>
+          <a:ln w="12700">
+            <a:solidFill>
+              <a:srgbClr val="006FAD"/>
+            </a:solidFill>
+            <a:prstDash val="solid"/>
+          </a:ln>
+        </p:spPr>
+      </p:sp>
+      <p:pic>
+        <p:nvPicPr>
+          <p:cNvPr id="4" name="icon-FaBook" descr="C:\Users\Thanam\AppData\Local\Temp\claude\c--Projekt-Trainings-azure-basics-training\d01384da-f513-40b3-985e-441cf1c86f9e\scratchpad\arbeit\assets\icons\FaBook.png">    </p:cNvPr>
+          <p:cNvPicPr>
+            <a:picLocks noChangeAspect="1"/>
+          </p:cNvPicPr>
+          <p:nvPr/>
+        </p:nvPicPr>
+        <p:blipFill>
+          <a:blip r:embed="rId1"/>
+          <a:stretch>
+            <a:fillRect/>
+          </a:stretch>
+        </p:blipFill>
+        <p:spPr>
+          <a:xfrm>
+            <a:off x="680314" y="3057754"/>
+            <a:ext cx="285293" cy="285293"/>
+          </a:xfrm>
+          <a:prstGeom prst="rect">
+            <a:avLst/>
+          </a:prstGeom>
+        </p:spPr>
+      </p:pic>
+      <p:sp>
+        <p:nvSpPr>
+          <p:cNvPr id="5" name="Text 2"/>
+          <p:cNvSpPr txBox="1"/>
+          <p:nvPr/>
+        </p:nvSpPr>
+        <p:spPr>
+          <a:xfrm>
+            <a:off x="1325880" y="2720340"/>
+            <a:ext cx="10317175" cy="960120"/>
+          </a:xfrm>
+          <a:prstGeom prst="rect">
+            <a:avLst/>
+          </a:prstGeom>
+          <a:noFill/>
+          <a:ln/>
+        </p:spPr>
+        <p:txBody>
+          <a:bodyPr wrap="square" lIns="0" tIns="0" rIns="0" bIns="0" rtlCol="0" anchor="ctr"/>
+          <a:lstStyle/>
+          <a:p>
+            <a:pPr indent="0" marL="0">
+              <a:buNone/>
+            </a:pPr>
+            <a:r>
+              <a:rPr lang="en-US" sz="1800" b="1" dirty="0">
+                <a:solidFill>
+                  <a:srgbClr val="27303A"/>
+                </a:solidFill>
+              </a:rPr>
+              <a:t>Theorie im Repository</a:t>
+            </a:r>
+            <a:endParaRPr lang="en-US" sz="1800" dirty="0"/>
+          </a:p>
+          <a:p>
+            <a:pPr indent="0" marL="0">
+              <a:buNone/>
+            </a:pPr>
+            <a:r>
+              <a:rPr lang="en-US" sz="1800" dirty="0">
+                <a:solidFill>
+                  <a:srgbClr val="6F6F6F"/>
+                </a:solidFill>
+              </a:rPr>
+              <a:t>theorie/04-azure-compute.md</a:t>
+            </a:r>
+            <a:endParaRPr lang="en-US" sz="1800" dirty="0"/>
+          </a:p>
+        </p:txBody>
+      </p:sp>
+      <p:sp>
+        <p:nvSpPr>
+          <p:cNvPr id="6" name="icon-kreis-FaGraduationCap"/>
+          <p:cNvSpPr/>
+          <p:nvPr/>
+        </p:nvSpPr>
+        <p:spPr>
+          <a:xfrm>
+            <a:off x="548640" y="3886200"/>
+            <a:ext cx="548640" cy="548640"/>
+          </a:xfrm>
+          <a:prstGeom prst="ellipse">
+            <a:avLst/>
+          </a:prstGeom>
+          <a:solidFill>
+            <a:srgbClr val="006FAD"/>
+          </a:solidFill>
+          <a:ln w="12700">
+            <a:solidFill>
+              <a:srgbClr val="006FAD"/>
+            </a:solidFill>
+            <a:prstDash val="solid"/>
+          </a:ln>
+        </p:spPr>
+      </p:sp>
+      <p:pic>
+        <p:nvPicPr>
+          <p:cNvPr id="7" name="icon-FaGraduationCap" descr="C:\Users\Thanam\AppData\Local\Temp\claude\c--Projekt-Trainings-azure-basics-training\d01384da-f513-40b3-985e-441cf1c86f9e\scratchpad\arbeit\assets\icons\FaGraduationCap.png">    </p:cNvPr>
+          <p:cNvPicPr>
+            <a:picLocks noChangeAspect="1"/>
+          </p:cNvPicPr>
+          <p:nvPr/>
+        </p:nvPicPr>
+        <p:blipFill>
+          <a:blip r:embed="rId2"/>
+          <a:stretch>
+            <a:fillRect/>
+          </a:stretch>
+        </p:blipFill>
+        <p:spPr>
+          <a:xfrm>
+            <a:off x="680314" y="4017874"/>
+            <a:ext cx="285293" cy="285293"/>
+          </a:xfrm>
+          <a:prstGeom prst="rect">
+            <a:avLst/>
+          </a:prstGeom>
+        </p:spPr>
+      </p:pic>
+      <p:sp>
+        <p:nvSpPr>
+          <p:cNvPr id="8" name="Text 4"/>
+          <p:cNvSpPr txBox="1"/>
+          <p:nvPr/>
+        </p:nvSpPr>
+        <p:spPr>
+          <a:xfrm>
+            <a:off x="1325880" y="3680460"/>
+            <a:ext cx="10317175" cy="960120"/>
+          </a:xfrm>
+          <a:prstGeom prst="rect">
+            <a:avLst/>
+          </a:prstGeom>
+          <a:noFill/>
+          <a:ln/>
+        </p:spPr>
+        <p:txBody>
+          <a:bodyPr wrap="square" lIns="0" tIns="0" rIns="0" bIns="0" rtlCol="0" anchor="ctr"/>
+          <a:lstStyle/>
+          <a:p>
+            <a:pPr indent="0" marL="0">
+              <a:buNone/>
+            </a:pPr>
+            <a:r>
+              <a:rPr lang="en-US" sz="1800" b="1" dirty="0">
+                <a:solidFill>
+                  <a:srgbClr val="27303A"/>
+                </a:solidFill>
+              </a:rPr>
+              <a:t>Microsoft Learn</a:t>
+            </a:r>
+            <a:endParaRPr lang="en-US" sz="1800" dirty="0"/>
+          </a:p>
+          <a:p>
+            <a:pPr indent="0" marL="0">
+              <a:buNone/>
+            </a:pPr>
+            <a:r>
+              <a:rPr lang="en-US" sz="1800" dirty="0">
+                <a:solidFill>
+                  <a:srgbClr val="6F6F6F"/>
+                </a:solidFill>
+              </a:rPr>
+              <a:t>Erstellen einer Linux-VM in Azure · Zustände und Abrechnung von VMs</a:t>
+            </a:r>
+            <a:endParaRPr lang="en-US" sz="1800" dirty="0"/>
+          </a:p>
+        </p:txBody>
+      </p:sp>
+      <p:sp>
+        <p:nvSpPr>
+          <p:cNvPr id="25" name="Slide Number Placeholder 0"/>
+          <p:cNvSpPr>
+            <a:spLocks noGrp="1"/>
+          </p:cNvSpPr>
+          <p:nvPr>
+            <p:ph type="sldNum" sz="quarter" idx="4294967295"/>
+          </p:nvPr>
+        </p:nvSpPr>
+        <p:spPr>
+          <a:xfrm>
+            <a:off x="11183112" y="6336792"/>
+            <a:ext cx="457200" cy="365760"/>
+          </a:xfrm>
+          <a:prstGeom prst="rect">
+            <a:avLst/>
+          </a:prstGeom>
+          <a:extLst>
+            <a:ext uri="{C572A759-6A51-4108-AA02-DFA0A04FC94B}">
+              <ma14:wrappingTextBoxFlag xmlns:ma14="http://schemas.microsoft.com/office/mac/drawingml/2011/main" val="0"/>
+            </a:ext>
+          </a:extLst>
+        </p:spPr>
+        <p:txBody>
+          <a:bodyPr/>
+          <a:lstStyle>
+            <a:lvl1pPr>
+              <a:defRPr sz="1000">
+                <a:solidFill>
+                  <a:srgbClr val="6F6F6F"/>
+                </a:solidFill>
+              </a:defRPr>
+            </a:lvl1pPr>
+          </a:lstStyle>
+          <a:p>
+            <a:pPr algn="r"/>
+            <a:fld id="{F7021451-1387-4CA6-816F-3879F97B5CBC}" type="slidenum">
+              <a:rPr b="0" lang="en-US"/>
+              <a:t>10</a:t>
+            </a:fld>
+            <a:endParaRPr lang="en-US"/>
+          </a:p>
+        </p:txBody>
+      </p:sp>
+    </p:spTree>
+  </p:cSld>
+  <p:clrMapOvr>
+    <a:masterClrMapping/>
+  </p:clrMapOvr>
+</p:sld>
+</file>
+
+<file path=ppt/slides/slide11.xml><?xml version="1.0" encoding="utf-8"?>
+<p:sld xmlns:a="http://schemas.openxmlformats.org/drawingml/2006/main" xmlns:r="http://schemas.openxmlformats.org/officeDocument/2006/relationships" xmlns:p="http://schemas.openxmlformats.org/presentationml/2006/main">
+  <p:cSld name="Slide 11">
+    <p:spTree>
+      <p:nvGrpSpPr>
+        <p:cNvPr id="1" name=""/>
+        <p:cNvGrpSpPr/>
+        <p:nvPr/>
+      </p:nvGrpSpPr>
+      <p:grpSpPr>
+        <a:xfrm>
+          <a:off x="0" y="0"/>
+          <a:ext cx="0" cy="0"/>
+          <a:chOff x="0" y="0"/>
+          <a:chExt cx="0" cy="0"/>
+        </a:xfrm>
+      </p:grpSpPr>
+      <p:sp>
+        <p:nvSpPr>
           <p:cNvPr id="2" name="Text 0"/>
           <p:cNvSpPr/>
           <p:nvPr>
@@ -5779,578 +6175,36 @@
                   <a:srgbClr val="27303A"/>
                 </a:solidFill>
               </a:rPr>
-              <a:t>Anmelden mit deinem SSH-Schlüssel</a:t>
+              <a:t>Wiederholung: Anmelden mit SSH-Schlüssel</a:t>
             </a:r>
             <a:endParaRPr lang="en-US" sz="3400" dirty="0"/>
           </a:p>
         </p:txBody>
       </p:sp>
-      <p:sp>
-        <p:nvSpPr>
-          <p:cNvPr id="3" name="schritt"/>
-          <p:cNvSpPr/>
+      <p:pic>
+        <p:nvPicPr>
+          <p:cNvPr id="3" name="diagramm" descr="Wiederholung: Anmelden mit SSH-Schlüssel">    </p:cNvPr>
+          <p:cNvPicPr>
+            <a:picLocks noChangeAspect="1"/>
+          </p:cNvPicPr>
           <p:nvPr/>
-        </p:nvSpPr>
-        <p:spPr>
-          <a:xfrm>
-            <a:off x="548640" y="1691640"/>
-            <a:ext cx="3423818" cy="3017520"/>
-          </a:xfrm>
-          <a:prstGeom prst="roundRect">
-            <a:avLst>
-              <a:gd name="adj" fmla="val 3636"/>
-            </a:avLst>
-          </a:prstGeom>
-          <a:solidFill>
-            <a:srgbClr val="F7F7F7"/>
-          </a:solidFill>
-          <a:ln w="12700">
-            <a:solidFill>
-              <a:srgbClr val="F7F7F7"/>
-            </a:solidFill>
-            <a:prstDash val="solid"/>
-          </a:ln>
-        </p:spPr>
-      </p:sp>
-      <p:sp>
-        <p:nvSpPr>
-          <p:cNvPr id="4" name="schritt-nr"/>
-          <p:cNvSpPr/>
-          <p:nvPr/>
-        </p:nvSpPr>
-        <p:spPr>
-          <a:xfrm>
-            <a:off x="1940509" y="1965960"/>
-            <a:ext cx="640080" cy="640080"/>
-          </a:xfrm>
-          <a:prstGeom prst="ellipse">
-            <a:avLst/>
-          </a:prstGeom>
-          <a:solidFill>
-            <a:srgbClr val="006FAD"/>
-          </a:solidFill>
-          <a:ln w="12700">
-            <a:solidFill>
-              <a:srgbClr val="006FAD"/>
-            </a:solidFill>
-            <a:prstDash val="solid"/>
-          </a:ln>
-        </p:spPr>
-      </p:sp>
-      <p:sp>
-        <p:nvSpPr>
-          <p:cNvPr id="5" name="Text 3"/>
-          <p:cNvSpPr txBox="1"/>
-          <p:nvPr/>
-        </p:nvSpPr>
-        <p:spPr>
-          <a:xfrm>
-            <a:off x="1940509" y="1965960"/>
-            <a:ext cx="640080" cy="640080"/>
+        </p:nvPicPr>
+        <p:blipFill>
+          <a:blip r:embed="rId1"/>
+          <a:stretch>
+            <a:fillRect/>
+          </a:stretch>
+        </p:blipFill>
+        <p:spPr>
+          <a:xfrm>
+            <a:off x="1367775" y="1325880"/>
+            <a:ext cx="9456145" cy="4709160"/>
           </a:xfrm>
           <a:prstGeom prst="rect">
             <a:avLst/>
           </a:prstGeom>
-          <a:noFill/>
-          <a:ln/>
-        </p:spPr>
-        <p:txBody>
-          <a:bodyPr wrap="square" lIns="0" tIns="0" rIns="0" bIns="0" rtlCol="0" anchor="ctr"/>
-          <a:lstStyle/>
-          <a:p>
-            <a:pPr algn="ctr" indent="0" marL="0">
-              <a:buNone/>
-            </a:pPr>
-            <a:r>
-              <a:rPr lang="en-US" sz="2000" b="1" dirty="0">
-                <a:solidFill>
-                  <a:srgbClr val="FFFFFF"/>
-                </a:solidFill>
-              </a:rPr>
-              <a:t>1</a:t>
-            </a:r>
-            <a:endParaRPr lang="en-US" sz="2000" dirty="0"/>
-          </a:p>
-        </p:txBody>
-      </p:sp>
-      <p:sp>
-        <p:nvSpPr>
-          <p:cNvPr id="6" name="Text 4"/>
-          <p:cNvSpPr txBox="1"/>
-          <p:nvPr/>
-        </p:nvSpPr>
-        <p:spPr>
-          <a:xfrm>
-            <a:off x="731520" y="2743200"/>
-            <a:ext cx="3058058" cy="640080"/>
-          </a:xfrm>
-          <a:prstGeom prst="rect">
-            <a:avLst/>
-          </a:prstGeom>
-          <a:noFill/>
-          <a:ln/>
-        </p:spPr>
-        <p:txBody>
-          <a:bodyPr wrap="square" lIns="0" tIns="0" rIns="0" bIns="0" rtlCol="0" anchor="ctr"/>
-          <a:lstStyle/>
-          <a:p>
-            <a:pPr algn="ctr" indent="0" marL="0">
-              <a:buNone/>
-            </a:pPr>
-            <a:r>
-              <a:rPr lang="en-US" sz="1700" b="1" dirty="0">
-                <a:solidFill>
-                  <a:srgbClr val="27303A"/>
-                </a:solidFill>
-              </a:rPr>
-              <a:t>Anzeigen</a:t>
-            </a:r>
-            <a:endParaRPr lang="en-US" sz="1700" dirty="0"/>
-          </a:p>
-        </p:txBody>
-      </p:sp>
-      <p:sp>
-        <p:nvSpPr>
-          <p:cNvPr id="7" name="Text 5"/>
-          <p:cNvSpPr txBox="1"/>
-          <p:nvPr/>
-        </p:nvSpPr>
-        <p:spPr>
-          <a:xfrm>
-            <a:off x="731520" y="3429000"/>
-            <a:ext cx="3058058" cy="1143000"/>
-          </a:xfrm>
-          <a:prstGeom prst="rect">
-            <a:avLst/>
-          </a:prstGeom>
-          <a:noFill/>
-          <a:ln/>
-        </p:spPr>
-        <p:txBody>
-          <a:bodyPr wrap="square" lIns="0" tIns="0" rIns="0" bIns="0" rtlCol="0" anchor="t"/>
-          <a:lstStyle/>
-          <a:p>
-            <a:pPr algn="ctr" indent="0" marL="0">
-              <a:buNone/>
-            </a:pPr>
-            <a:r>
-              <a:rPr lang="en-US" sz="1600" dirty="0">
-                <a:solidFill>
-                  <a:srgbClr val="27303A"/>
-                </a:solidFill>
-              </a:rPr>
-              <a:t>In PowerShell: Get-Content ~\.ssh\id_ed25519.pub</a:t>
-            </a:r>
-            <a:endParaRPr lang="en-US" sz="1600" dirty="0"/>
-          </a:p>
-        </p:txBody>
-      </p:sp>
-      <p:sp>
-        <p:nvSpPr>
-          <p:cNvPr id="8" name="pfeil"/>
-          <p:cNvSpPr/>
-          <p:nvPr/>
-        </p:nvSpPr>
-        <p:spPr>
-          <a:xfrm>
-            <a:off x="4036466" y="3063240"/>
-            <a:ext cx="283464" cy="274320"/>
-          </a:xfrm>
-          <a:prstGeom prst="rightArrow">
-            <a:avLst/>
-          </a:prstGeom>
-          <a:solidFill>
-            <a:srgbClr val="6F6F6F"/>
-          </a:solidFill>
-          <a:ln w="12700">
-            <a:solidFill>
-              <a:srgbClr val="6F6F6F"/>
-            </a:solidFill>
-            <a:prstDash val="solid"/>
-          </a:ln>
-        </p:spPr>
-      </p:sp>
-      <p:sp>
-        <p:nvSpPr>
-          <p:cNvPr id="9" name="schritt"/>
-          <p:cNvSpPr/>
-          <p:nvPr/>
-        </p:nvSpPr>
-        <p:spPr>
-          <a:xfrm>
-            <a:off x="4383938" y="1691640"/>
-            <a:ext cx="3423818" cy="3017520"/>
-          </a:xfrm>
-          <a:prstGeom prst="roundRect">
-            <a:avLst>
-              <a:gd name="adj" fmla="val 3636"/>
-            </a:avLst>
-          </a:prstGeom>
-          <a:solidFill>
-            <a:srgbClr val="F7F7F7"/>
-          </a:solidFill>
-          <a:ln w="12700">
-            <a:solidFill>
-              <a:srgbClr val="F7F7F7"/>
-            </a:solidFill>
-            <a:prstDash val="solid"/>
-          </a:ln>
-        </p:spPr>
-      </p:sp>
-      <p:sp>
-        <p:nvSpPr>
-          <p:cNvPr id="10" name="schritt-nr"/>
-          <p:cNvSpPr/>
-          <p:nvPr/>
-        </p:nvSpPr>
-        <p:spPr>
-          <a:xfrm>
-            <a:off x="5775808" y="1965960"/>
-            <a:ext cx="640080" cy="640080"/>
-          </a:xfrm>
-          <a:prstGeom prst="ellipse">
-            <a:avLst/>
-          </a:prstGeom>
-          <a:solidFill>
-            <a:srgbClr val="006FAD"/>
-          </a:solidFill>
-          <a:ln w="12700">
-            <a:solidFill>
-              <a:srgbClr val="006FAD"/>
-            </a:solidFill>
-            <a:prstDash val="solid"/>
-          </a:ln>
-        </p:spPr>
-      </p:sp>
-      <p:sp>
-        <p:nvSpPr>
-          <p:cNvPr id="11" name="Text 9"/>
-          <p:cNvSpPr txBox="1"/>
-          <p:nvPr/>
-        </p:nvSpPr>
-        <p:spPr>
-          <a:xfrm>
-            <a:off x="5775808" y="1965960"/>
-            <a:ext cx="640080" cy="640080"/>
-          </a:xfrm>
-          <a:prstGeom prst="rect">
-            <a:avLst/>
-          </a:prstGeom>
-          <a:noFill/>
-          <a:ln/>
-        </p:spPr>
-        <p:txBody>
-          <a:bodyPr wrap="square" lIns="0" tIns="0" rIns="0" bIns="0" rtlCol="0" anchor="ctr"/>
-          <a:lstStyle/>
-          <a:p>
-            <a:pPr algn="ctr" indent="0" marL="0">
-              <a:buNone/>
-            </a:pPr>
-            <a:r>
-              <a:rPr lang="en-US" sz="2000" b="1" dirty="0">
-                <a:solidFill>
-                  <a:srgbClr val="FFFFFF"/>
-                </a:solidFill>
-              </a:rPr>
-              <a:t>2</a:t>
-            </a:r>
-            <a:endParaRPr lang="en-US" sz="2000" dirty="0"/>
-          </a:p>
-        </p:txBody>
-      </p:sp>
-      <p:sp>
-        <p:nvSpPr>
-          <p:cNvPr id="12" name="Text 10"/>
-          <p:cNvSpPr txBox="1"/>
-          <p:nvPr/>
-        </p:nvSpPr>
-        <p:spPr>
-          <a:xfrm>
-            <a:off x="4566818" y="2743200"/>
-            <a:ext cx="3058058" cy="640080"/>
-          </a:xfrm>
-          <a:prstGeom prst="rect">
-            <a:avLst/>
-          </a:prstGeom>
-          <a:noFill/>
-          <a:ln/>
-        </p:spPr>
-        <p:txBody>
-          <a:bodyPr wrap="square" lIns="0" tIns="0" rIns="0" bIns="0" rtlCol="0" anchor="ctr"/>
-          <a:lstStyle/>
-          <a:p>
-            <a:pPr algn="ctr" indent="0" marL="0">
-              <a:buNone/>
-            </a:pPr>
-            <a:r>
-              <a:rPr lang="en-US" sz="1700" b="1" dirty="0">
-                <a:solidFill>
-                  <a:srgbClr val="27303A"/>
-                </a:solidFill>
-              </a:rPr>
-              <a:t>Mitgeben</a:t>
-            </a:r>
-            <a:endParaRPr lang="en-US" sz="1700" dirty="0"/>
-          </a:p>
-        </p:txBody>
-      </p:sp>
-      <p:sp>
-        <p:nvSpPr>
-          <p:cNvPr id="13" name="Text 11"/>
-          <p:cNvSpPr txBox="1"/>
-          <p:nvPr/>
-        </p:nvSpPr>
-        <p:spPr>
-          <a:xfrm>
-            <a:off x="4566818" y="3429000"/>
-            <a:ext cx="3058058" cy="1143000"/>
-          </a:xfrm>
-          <a:prstGeom prst="rect">
-            <a:avLst/>
-          </a:prstGeom>
-          <a:noFill/>
-          <a:ln/>
-        </p:spPr>
-        <p:txBody>
-          <a:bodyPr wrap="square" lIns="0" tIns="0" rIns="0" bIns="0" rtlCol="0" anchor="t"/>
-          <a:lstStyle/>
-          <a:p>
-            <a:pPr algn="ctr" indent="0" marL="0">
-              <a:buNone/>
-            </a:pPr>
-            <a:r>
-              <a:rPr lang="en-US" sz="1600" dirty="0">
-                <a:solidFill>
-                  <a:srgbClr val="27303A"/>
-                </a:solidFill>
-              </a:rPr>
-              <a:t>Im Portal als vorhandenen öffentlichen Schlüssel einfügen</a:t>
-            </a:r>
-            <a:endParaRPr lang="en-US" sz="1600" dirty="0"/>
-          </a:p>
-        </p:txBody>
-      </p:sp>
-      <p:sp>
-        <p:nvSpPr>
-          <p:cNvPr id="14" name="pfeil"/>
-          <p:cNvSpPr/>
-          <p:nvPr/>
-        </p:nvSpPr>
-        <p:spPr>
-          <a:xfrm>
-            <a:off x="7871765" y="3063240"/>
-            <a:ext cx="283464" cy="274320"/>
-          </a:xfrm>
-          <a:prstGeom prst="rightArrow">
-            <a:avLst/>
-          </a:prstGeom>
-          <a:solidFill>
-            <a:srgbClr val="6F6F6F"/>
-          </a:solidFill>
-          <a:ln w="12700">
-            <a:solidFill>
-              <a:srgbClr val="6F6F6F"/>
-            </a:solidFill>
-            <a:prstDash val="solid"/>
-          </a:ln>
-        </p:spPr>
-      </p:sp>
-      <p:sp>
-        <p:nvSpPr>
-          <p:cNvPr id="15" name="schritt"/>
-          <p:cNvSpPr/>
-          <p:nvPr/>
-        </p:nvSpPr>
-        <p:spPr>
-          <a:xfrm>
-            <a:off x="8219237" y="1691640"/>
-            <a:ext cx="3423818" cy="3017520"/>
-          </a:xfrm>
-          <a:prstGeom prst="roundRect">
-            <a:avLst>
-              <a:gd name="adj" fmla="val 3636"/>
-            </a:avLst>
-          </a:prstGeom>
-          <a:solidFill>
-            <a:srgbClr val="F7F7F7"/>
-          </a:solidFill>
-          <a:ln w="12700">
-            <a:solidFill>
-              <a:srgbClr val="F7F7F7"/>
-            </a:solidFill>
-            <a:prstDash val="solid"/>
-          </a:ln>
-        </p:spPr>
-      </p:sp>
-      <p:sp>
-        <p:nvSpPr>
-          <p:cNvPr id="16" name="schritt-nr"/>
-          <p:cNvSpPr/>
-          <p:nvPr/>
-        </p:nvSpPr>
-        <p:spPr>
-          <a:xfrm>
-            <a:off x="9611106" y="1965960"/>
-            <a:ext cx="640080" cy="640080"/>
-          </a:xfrm>
-          <a:prstGeom prst="ellipse">
-            <a:avLst/>
-          </a:prstGeom>
-          <a:solidFill>
-            <a:srgbClr val="006FAD"/>
-          </a:solidFill>
-          <a:ln w="12700">
-            <a:solidFill>
-              <a:srgbClr val="006FAD"/>
-            </a:solidFill>
-            <a:prstDash val="solid"/>
-          </a:ln>
-        </p:spPr>
-      </p:sp>
-      <p:sp>
-        <p:nvSpPr>
-          <p:cNvPr id="17" name="Text 15"/>
-          <p:cNvSpPr txBox="1"/>
-          <p:nvPr/>
-        </p:nvSpPr>
-        <p:spPr>
-          <a:xfrm>
-            <a:off x="9611106" y="1965960"/>
-            <a:ext cx="640080" cy="640080"/>
-          </a:xfrm>
-          <a:prstGeom prst="rect">
-            <a:avLst/>
-          </a:prstGeom>
-          <a:noFill/>
-          <a:ln/>
-        </p:spPr>
-        <p:txBody>
-          <a:bodyPr wrap="square" lIns="0" tIns="0" rIns="0" bIns="0" rtlCol="0" anchor="ctr"/>
-          <a:lstStyle/>
-          <a:p>
-            <a:pPr algn="ctr" indent="0" marL="0">
-              <a:buNone/>
-            </a:pPr>
-            <a:r>
-              <a:rPr lang="en-US" sz="2000" b="1" dirty="0">
-                <a:solidFill>
-                  <a:srgbClr val="FFFFFF"/>
-                </a:solidFill>
-              </a:rPr>
-              <a:t>3</a:t>
-            </a:r>
-            <a:endParaRPr lang="en-US" sz="2000" dirty="0"/>
-          </a:p>
-        </p:txBody>
-      </p:sp>
-      <p:sp>
-        <p:nvSpPr>
-          <p:cNvPr id="18" name="Text 16"/>
-          <p:cNvSpPr txBox="1"/>
-          <p:nvPr/>
-        </p:nvSpPr>
-        <p:spPr>
-          <a:xfrm>
-            <a:off x="8402117" y="2743200"/>
-            <a:ext cx="3058058" cy="640080"/>
-          </a:xfrm>
-          <a:prstGeom prst="rect">
-            <a:avLst/>
-          </a:prstGeom>
-          <a:noFill/>
-          <a:ln/>
-        </p:spPr>
-        <p:txBody>
-          <a:bodyPr wrap="square" lIns="0" tIns="0" rIns="0" bIns="0" rtlCol="0" anchor="ctr"/>
-          <a:lstStyle/>
-          <a:p>
-            <a:pPr algn="ctr" indent="0" marL="0">
-              <a:buNone/>
-            </a:pPr>
-            <a:r>
-              <a:rPr lang="en-US" sz="1700" b="1" dirty="0">
-                <a:solidFill>
-                  <a:srgbClr val="27303A"/>
-                </a:solidFill>
-              </a:rPr>
-              <a:t>Verbinden</a:t>
-            </a:r>
-            <a:endParaRPr lang="en-US" sz="1700" dirty="0"/>
-          </a:p>
-        </p:txBody>
-      </p:sp>
-      <p:sp>
-        <p:nvSpPr>
-          <p:cNvPr id="19" name="Text 17"/>
-          <p:cNvSpPr txBox="1"/>
-          <p:nvPr/>
-        </p:nvSpPr>
-        <p:spPr>
-          <a:xfrm>
-            <a:off x="8402117" y="3429000"/>
-            <a:ext cx="3058058" cy="1143000"/>
-          </a:xfrm>
-          <a:prstGeom prst="rect">
-            <a:avLst/>
-          </a:prstGeom>
-          <a:noFill/>
-          <a:ln/>
-        </p:spPr>
-        <p:txBody>
-          <a:bodyPr wrap="square" lIns="0" tIns="0" rIns="0" bIns="0" rtlCol="0" anchor="t"/>
-          <a:lstStyle/>
-          <a:p>
-            <a:pPr algn="ctr" indent="0" marL="0">
-              <a:buNone/>
-            </a:pPr>
-            <a:r>
-              <a:rPr lang="en-US" sz="1600" dirty="0">
-                <a:solidFill>
-                  <a:srgbClr val="27303A"/>
-                </a:solidFill>
-              </a:rPr>
-              <a:t>ssh azureuser@&lt;öffentliche-ip&gt; – vom Laptop aus</a:t>
-            </a:r>
-            <a:endParaRPr lang="en-US" sz="1600" dirty="0"/>
-          </a:p>
-        </p:txBody>
-      </p:sp>
-      <p:sp>
-        <p:nvSpPr>
-          <p:cNvPr id="20" name="Text 18"/>
-          <p:cNvSpPr txBox="1"/>
-          <p:nvPr/>
-        </p:nvSpPr>
-        <p:spPr>
-          <a:xfrm>
-            <a:off x="548640" y="5074920"/>
-            <a:ext cx="11094415" cy="731520"/>
-          </a:xfrm>
-          <a:prstGeom prst="rect">
-            <a:avLst/>
-          </a:prstGeom>
-          <a:noFill/>
-          <a:ln/>
-        </p:spPr>
-        <p:txBody>
-          <a:bodyPr wrap="square" lIns="0" tIns="0" rIns="0" bIns="0" rtlCol="0" anchor="ctr"/>
-          <a:lstStyle/>
-          <a:p>
-            <a:pPr indent="0" marL="0">
-              <a:buNone/>
-            </a:pPr>
-            <a:r>
-              <a:rPr lang="en-US" sz="1600" dirty="0">
-                <a:solidFill>
-                  <a:srgbClr val="27303A"/>
-                </a:solidFill>
-              </a:rPr>
-              <a:t>Den privaten Schlüssel gibst du nie heraus. In Azure landet nur der öffentliche.</a:t>
-            </a:r>
-            <a:endParaRPr lang="en-US" sz="1600" dirty="0"/>
-          </a:p>
-        </p:txBody>
-      </p:sp>
+        </p:spPr>
+      </p:pic>
       <p:sp>
         <p:nvSpPr>
           <p:cNvPr id="25" name="Slide Number Placeholder 0"/>
@@ -6453,6 +6307,680 @@
                   <a:srgbClr val="27303A"/>
                 </a:solidFill>
               </a:rPr>
+              <a:t>Anmelden mit deinem SSH-Schlüssel</a:t>
+            </a:r>
+            <a:endParaRPr lang="en-US" sz="3400" dirty="0"/>
+          </a:p>
+        </p:txBody>
+      </p:sp>
+      <p:sp>
+        <p:nvSpPr>
+          <p:cNvPr id="3" name="schritt"/>
+          <p:cNvSpPr/>
+          <p:nvPr/>
+        </p:nvSpPr>
+        <p:spPr>
+          <a:xfrm>
+            <a:off x="548640" y="1691640"/>
+            <a:ext cx="3423818" cy="3017520"/>
+          </a:xfrm>
+          <a:prstGeom prst="roundRect">
+            <a:avLst>
+              <a:gd name="adj" fmla="val 3636"/>
+            </a:avLst>
+          </a:prstGeom>
+          <a:solidFill>
+            <a:srgbClr val="F7F7F7"/>
+          </a:solidFill>
+          <a:ln w="12700">
+            <a:solidFill>
+              <a:srgbClr val="F7F7F7"/>
+            </a:solidFill>
+            <a:prstDash val="solid"/>
+          </a:ln>
+        </p:spPr>
+      </p:sp>
+      <p:sp>
+        <p:nvSpPr>
+          <p:cNvPr id="4" name="schritt-nr"/>
+          <p:cNvSpPr/>
+          <p:nvPr/>
+        </p:nvSpPr>
+        <p:spPr>
+          <a:xfrm>
+            <a:off x="1940509" y="1965960"/>
+            <a:ext cx="640080" cy="640080"/>
+          </a:xfrm>
+          <a:prstGeom prst="ellipse">
+            <a:avLst/>
+          </a:prstGeom>
+          <a:solidFill>
+            <a:srgbClr val="006FAD"/>
+          </a:solidFill>
+          <a:ln w="12700">
+            <a:solidFill>
+              <a:srgbClr val="006FAD"/>
+            </a:solidFill>
+            <a:prstDash val="solid"/>
+          </a:ln>
+        </p:spPr>
+      </p:sp>
+      <p:sp>
+        <p:nvSpPr>
+          <p:cNvPr id="5" name="Text 3"/>
+          <p:cNvSpPr txBox="1"/>
+          <p:nvPr/>
+        </p:nvSpPr>
+        <p:spPr>
+          <a:xfrm>
+            <a:off x="1940509" y="1965960"/>
+            <a:ext cx="640080" cy="640080"/>
+          </a:xfrm>
+          <a:prstGeom prst="rect">
+            <a:avLst/>
+          </a:prstGeom>
+          <a:noFill/>
+          <a:ln/>
+        </p:spPr>
+        <p:txBody>
+          <a:bodyPr wrap="square" lIns="0" tIns="0" rIns="0" bIns="0" rtlCol="0" anchor="ctr"/>
+          <a:lstStyle/>
+          <a:p>
+            <a:pPr algn="ctr" indent="0" marL="0">
+              <a:buNone/>
+            </a:pPr>
+            <a:r>
+              <a:rPr lang="en-US" sz="2000" b="1" dirty="0">
+                <a:solidFill>
+                  <a:srgbClr val="FFFFFF"/>
+                </a:solidFill>
+              </a:rPr>
+              <a:t>1</a:t>
+            </a:r>
+            <a:endParaRPr lang="en-US" sz="2000" dirty="0"/>
+          </a:p>
+        </p:txBody>
+      </p:sp>
+      <p:sp>
+        <p:nvSpPr>
+          <p:cNvPr id="6" name="Text 4"/>
+          <p:cNvSpPr txBox="1"/>
+          <p:nvPr/>
+        </p:nvSpPr>
+        <p:spPr>
+          <a:xfrm>
+            <a:off x="731520" y="2743200"/>
+            <a:ext cx="3058058" cy="640080"/>
+          </a:xfrm>
+          <a:prstGeom prst="rect">
+            <a:avLst/>
+          </a:prstGeom>
+          <a:noFill/>
+          <a:ln/>
+        </p:spPr>
+        <p:txBody>
+          <a:bodyPr wrap="square" lIns="0" tIns="0" rIns="0" bIns="0" rtlCol="0" anchor="ctr"/>
+          <a:lstStyle/>
+          <a:p>
+            <a:pPr algn="ctr" indent="0" marL="0">
+              <a:buNone/>
+            </a:pPr>
+            <a:r>
+              <a:rPr lang="en-US" sz="1700" b="1" dirty="0">
+                <a:solidFill>
+                  <a:srgbClr val="27303A"/>
+                </a:solidFill>
+              </a:rPr>
+              <a:t>Anzeigen</a:t>
+            </a:r>
+            <a:endParaRPr lang="en-US" sz="1700" dirty="0"/>
+          </a:p>
+        </p:txBody>
+      </p:sp>
+      <p:sp>
+        <p:nvSpPr>
+          <p:cNvPr id="7" name="Text 5"/>
+          <p:cNvSpPr txBox="1"/>
+          <p:nvPr/>
+        </p:nvSpPr>
+        <p:spPr>
+          <a:xfrm>
+            <a:off x="731520" y="3429000"/>
+            <a:ext cx="3058058" cy="1143000"/>
+          </a:xfrm>
+          <a:prstGeom prst="rect">
+            <a:avLst/>
+          </a:prstGeom>
+          <a:noFill/>
+          <a:ln/>
+        </p:spPr>
+        <p:txBody>
+          <a:bodyPr wrap="square" lIns="0" tIns="0" rIns="0" bIns="0" rtlCol="0" anchor="t"/>
+          <a:lstStyle/>
+          <a:p>
+            <a:pPr algn="ctr" indent="0" marL="0">
+              <a:buNone/>
+            </a:pPr>
+            <a:r>
+              <a:rPr lang="en-US" sz="1600" dirty="0">
+                <a:solidFill>
+                  <a:srgbClr val="27303A"/>
+                </a:solidFill>
+              </a:rPr>
+              <a:t>In PowerShell: Get-Content ~\.ssh\id_ed25519.pub</a:t>
+            </a:r>
+            <a:endParaRPr lang="en-US" sz="1600" dirty="0"/>
+          </a:p>
+        </p:txBody>
+      </p:sp>
+      <p:sp>
+        <p:nvSpPr>
+          <p:cNvPr id="8" name="pfeil"/>
+          <p:cNvSpPr/>
+          <p:nvPr/>
+        </p:nvSpPr>
+        <p:spPr>
+          <a:xfrm>
+            <a:off x="4036466" y="3063240"/>
+            <a:ext cx="283464" cy="274320"/>
+          </a:xfrm>
+          <a:prstGeom prst="rightArrow">
+            <a:avLst/>
+          </a:prstGeom>
+          <a:solidFill>
+            <a:srgbClr val="6F6F6F"/>
+          </a:solidFill>
+          <a:ln w="12700">
+            <a:solidFill>
+              <a:srgbClr val="6F6F6F"/>
+            </a:solidFill>
+            <a:prstDash val="solid"/>
+          </a:ln>
+        </p:spPr>
+      </p:sp>
+      <p:sp>
+        <p:nvSpPr>
+          <p:cNvPr id="9" name="schritt"/>
+          <p:cNvSpPr/>
+          <p:nvPr/>
+        </p:nvSpPr>
+        <p:spPr>
+          <a:xfrm>
+            <a:off x="4383938" y="1691640"/>
+            <a:ext cx="3423818" cy="3017520"/>
+          </a:xfrm>
+          <a:prstGeom prst="roundRect">
+            <a:avLst>
+              <a:gd name="adj" fmla="val 3636"/>
+            </a:avLst>
+          </a:prstGeom>
+          <a:solidFill>
+            <a:srgbClr val="F7F7F7"/>
+          </a:solidFill>
+          <a:ln w="12700">
+            <a:solidFill>
+              <a:srgbClr val="F7F7F7"/>
+            </a:solidFill>
+            <a:prstDash val="solid"/>
+          </a:ln>
+        </p:spPr>
+      </p:sp>
+      <p:sp>
+        <p:nvSpPr>
+          <p:cNvPr id="10" name="schritt-nr"/>
+          <p:cNvSpPr/>
+          <p:nvPr/>
+        </p:nvSpPr>
+        <p:spPr>
+          <a:xfrm>
+            <a:off x="5775808" y="1965960"/>
+            <a:ext cx="640080" cy="640080"/>
+          </a:xfrm>
+          <a:prstGeom prst="ellipse">
+            <a:avLst/>
+          </a:prstGeom>
+          <a:solidFill>
+            <a:srgbClr val="006FAD"/>
+          </a:solidFill>
+          <a:ln w="12700">
+            <a:solidFill>
+              <a:srgbClr val="006FAD"/>
+            </a:solidFill>
+            <a:prstDash val="solid"/>
+          </a:ln>
+        </p:spPr>
+      </p:sp>
+      <p:sp>
+        <p:nvSpPr>
+          <p:cNvPr id="11" name="Text 9"/>
+          <p:cNvSpPr txBox="1"/>
+          <p:nvPr/>
+        </p:nvSpPr>
+        <p:spPr>
+          <a:xfrm>
+            <a:off x="5775808" y="1965960"/>
+            <a:ext cx="640080" cy="640080"/>
+          </a:xfrm>
+          <a:prstGeom prst="rect">
+            <a:avLst/>
+          </a:prstGeom>
+          <a:noFill/>
+          <a:ln/>
+        </p:spPr>
+        <p:txBody>
+          <a:bodyPr wrap="square" lIns="0" tIns="0" rIns="0" bIns="0" rtlCol="0" anchor="ctr"/>
+          <a:lstStyle/>
+          <a:p>
+            <a:pPr algn="ctr" indent="0" marL="0">
+              <a:buNone/>
+            </a:pPr>
+            <a:r>
+              <a:rPr lang="en-US" sz="2000" b="1" dirty="0">
+                <a:solidFill>
+                  <a:srgbClr val="FFFFFF"/>
+                </a:solidFill>
+              </a:rPr>
+              <a:t>2</a:t>
+            </a:r>
+            <a:endParaRPr lang="en-US" sz="2000" dirty="0"/>
+          </a:p>
+        </p:txBody>
+      </p:sp>
+      <p:sp>
+        <p:nvSpPr>
+          <p:cNvPr id="12" name="Text 10"/>
+          <p:cNvSpPr txBox="1"/>
+          <p:nvPr/>
+        </p:nvSpPr>
+        <p:spPr>
+          <a:xfrm>
+            <a:off x="4566818" y="2743200"/>
+            <a:ext cx="3058058" cy="640080"/>
+          </a:xfrm>
+          <a:prstGeom prst="rect">
+            <a:avLst/>
+          </a:prstGeom>
+          <a:noFill/>
+          <a:ln/>
+        </p:spPr>
+        <p:txBody>
+          <a:bodyPr wrap="square" lIns="0" tIns="0" rIns="0" bIns="0" rtlCol="0" anchor="ctr"/>
+          <a:lstStyle/>
+          <a:p>
+            <a:pPr algn="ctr" indent="0" marL="0">
+              <a:buNone/>
+            </a:pPr>
+            <a:r>
+              <a:rPr lang="en-US" sz="1700" b="1" dirty="0">
+                <a:solidFill>
+                  <a:srgbClr val="27303A"/>
+                </a:solidFill>
+              </a:rPr>
+              <a:t>Mitgeben</a:t>
+            </a:r>
+            <a:endParaRPr lang="en-US" sz="1700" dirty="0"/>
+          </a:p>
+        </p:txBody>
+      </p:sp>
+      <p:sp>
+        <p:nvSpPr>
+          <p:cNvPr id="13" name="Text 11"/>
+          <p:cNvSpPr txBox="1"/>
+          <p:nvPr/>
+        </p:nvSpPr>
+        <p:spPr>
+          <a:xfrm>
+            <a:off x="4566818" y="3429000"/>
+            <a:ext cx="3058058" cy="1143000"/>
+          </a:xfrm>
+          <a:prstGeom prst="rect">
+            <a:avLst/>
+          </a:prstGeom>
+          <a:noFill/>
+          <a:ln/>
+        </p:spPr>
+        <p:txBody>
+          <a:bodyPr wrap="square" lIns="0" tIns="0" rIns="0" bIns="0" rtlCol="0" anchor="t"/>
+          <a:lstStyle/>
+          <a:p>
+            <a:pPr algn="ctr" indent="0" marL="0">
+              <a:buNone/>
+            </a:pPr>
+            <a:r>
+              <a:rPr lang="en-US" sz="1600" dirty="0">
+                <a:solidFill>
+                  <a:srgbClr val="27303A"/>
+                </a:solidFill>
+              </a:rPr>
+              <a:t>Im Portal als vorhandenen öffentlichen Schlüssel einfügen</a:t>
+            </a:r>
+            <a:endParaRPr lang="en-US" sz="1600" dirty="0"/>
+          </a:p>
+        </p:txBody>
+      </p:sp>
+      <p:sp>
+        <p:nvSpPr>
+          <p:cNvPr id="14" name="pfeil"/>
+          <p:cNvSpPr/>
+          <p:nvPr/>
+        </p:nvSpPr>
+        <p:spPr>
+          <a:xfrm>
+            <a:off x="7871765" y="3063240"/>
+            <a:ext cx="283464" cy="274320"/>
+          </a:xfrm>
+          <a:prstGeom prst="rightArrow">
+            <a:avLst/>
+          </a:prstGeom>
+          <a:solidFill>
+            <a:srgbClr val="6F6F6F"/>
+          </a:solidFill>
+          <a:ln w="12700">
+            <a:solidFill>
+              <a:srgbClr val="6F6F6F"/>
+            </a:solidFill>
+            <a:prstDash val="solid"/>
+          </a:ln>
+        </p:spPr>
+      </p:sp>
+      <p:sp>
+        <p:nvSpPr>
+          <p:cNvPr id="15" name="schritt"/>
+          <p:cNvSpPr/>
+          <p:nvPr/>
+        </p:nvSpPr>
+        <p:spPr>
+          <a:xfrm>
+            <a:off x="8219237" y="1691640"/>
+            <a:ext cx="3423818" cy="3017520"/>
+          </a:xfrm>
+          <a:prstGeom prst="roundRect">
+            <a:avLst>
+              <a:gd name="adj" fmla="val 3636"/>
+            </a:avLst>
+          </a:prstGeom>
+          <a:solidFill>
+            <a:srgbClr val="F7F7F7"/>
+          </a:solidFill>
+          <a:ln w="12700">
+            <a:solidFill>
+              <a:srgbClr val="F7F7F7"/>
+            </a:solidFill>
+            <a:prstDash val="solid"/>
+          </a:ln>
+        </p:spPr>
+      </p:sp>
+      <p:sp>
+        <p:nvSpPr>
+          <p:cNvPr id="16" name="schritt-nr"/>
+          <p:cNvSpPr/>
+          <p:nvPr/>
+        </p:nvSpPr>
+        <p:spPr>
+          <a:xfrm>
+            <a:off x="9611106" y="1965960"/>
+            <a:ext cx="640080" cy="640080"/>
+          </a:xfrm>
+          <a:prstGeom prst="ellipse">
+            <a:avLst/>
+          </a:prstGeom>
+          <a:solidFill>
+            <a:srgbClr val="006FAD"/>
+          </a:solidFill>
+          <a:ln w="12700">
+            <a:solidFill>
+              <a:srgbClr val="006FAD"/>
+            </a:solidFill>
+            <a:prstDash val="solid"/>
+          </a:ln>
+        </p:spPr>
+      </p:sp>
+      <p:sp>
+        <p:nvSpPr>
+          <p:cNvPr id="17" name="Text 15"/>
+          <p:cNvSpPr txBox="1"/>
+          <p:nvPr/>
+        </p:nvSpPr>
+        <p:spPr>
+          <a:xfrm>
+            <a:off x="9611106" y="1965960"/>
+            <a:ext cx="640080" cy="640080"/>
+          </a:xfrm>
+          <a:prstGeom prst="rect">
+            <a:avLst/>
+          </a:prstGeom>
+          <a:noFill/>
+          <a:ln/>
+        </p:spPr>
+        <p:txBody>
+          <a:bodyPr wrap="square" lIns="0" tIns="0" rIns="0" bIns="0" rtlCol="0" anchor="ctr"/>
+          <a:lstStyle/>
+          <a:p>
+            <a:pPr algn="ctr" indent="0" marL="0">
+              <a:buNone/>
+            </a:pPr>
+            <a:r>
+              <a:rPr lang="en-US" sz="2000" b="1" dirty="0">
+                <a:solidFill>
+                  <a:srgbClr val="FFFFFF"/>
+                </a:solidFill>
+              </a:rPr>
+              <a:t>3</a:t>
+            </a:r>
+            <a:endParaRPr lang="en-US" sz="2000" dirty="0"/>
+          </a:p>
+        </p:txBody>
+      </p:sp>
+      <p:sp>
+        <p:nvSpPr>
+          <p:cNvPr id="18" name="Text 16"/>
+          <p:cNvSpPr txBox="1"/>
+          <p:nvPr/>
+        </p:nvSpPr>
+        <p:spPr>
+          <a:xfrm>
+            <a:off x="8402117" y="2743200"/>
+            <a:ext cx="3058058" cy="640080"/>
+          </a:xfrm>
+          <a:prstGeom prst="rect">
+            <a:avLst/>
+          </a:prstGeom>
+          <a:noFill/>
+          <a:ln/>
+        </p:spPr>
+        <p:txBody>
+          <a:bodyPr wrap="square" lIns="0" tIns="0" rIns="0" bIns="0" rtlCol="0" anchor="ctr"/>
+          <a:lstStyle/>
+          <a:p>
+            <a:pPr algn="ctr" indent="0" marL="0">
+              <a:buNone/>
+            </a:pPr>
+            <a:r>
+              <a:rPr lang="en-US" sz="1700" b="1" dirty="0">
+                <a:solidFill>
+                  <a:srgbClr val="27303A"/>
+                </a:solidFill>
+              </a:rPr>
+              <a:t>Verbinden</a:t>
+            </a:r>
+            <a:endParaRPr lang="en-US" sz="1700" dirty="0"/>
+          </a:p>
+        </p:txBody>
+      </p:sp>
+      <p:sp>
+        <p:nvSpPr>
+          <p:cNvPr id="19" name="Text 17"/>
+          <p:cNvSpPr txBox="1"/>
+          <p:nvPr/>
+        </p:nvSpPr>
+        <p:spPr>
+          <a:xfrm>
+            <a:off x="8402117" y="3429000"/>
+            <a:ext cx="3058058" cy="1143000"/>
+          </a:xfrm>
+          <a:prstGeom prst="rect">
+            <a:avLst/>
+          </a:prstGeom>
+          <a:noFill/>
+          <a:ln/>
+        </p:spPr>
+        <p:txBody>
+          <a:bodyPr wrap="square" lIns="0" tIns="0" rIns="0" bIns="0" rtlCol="0" anchor="t"/>
+          <a:lstStyle/>
+          <a:p>
+            <a:pPr algn="ctr" indent="0" marL="0">
+              <a:buNone/>
+            </a:pPr>
+            <a:r>
+              <a:rPr lang="en-US" sz="1600" dirty="0">
+                <a:solidFill>
+                  <a:srgbClr val="27303A"/>
+                </a:solidFill>
+              </a:rPr>
+              <a:t>ssh azureuser@&lt;öffentliche-ip&gt; – vom Laptop aus</a:t>
+            </a:r>
+            <a:endParaRPr lang="en-US" sz="1600" dirty="0"/>
+          </a:p>
+        </p:txBody>
+      </p:sp>
+      <p:sp>
+        <p:nvSpPr>
+          <p:cNvPr id="20" name="Text 18"/>
+          <p:cNvSpPr txBox="1"/>
+          <p:nvPr/>
+        </p:nvSpPr>
+        <p:spPr>
+          <a:xfrm>
+            <a:off x="548640" y="5074920"/>
+            <a:ext cx="11094415" cy="731520"/>
+          </a:xfrm>
+          <a:prstGeom prst="rect">
+            <a:avLst/>
+          </a:prstGeom>
+          <a:noFill/>
+          <a:ln/>
+        </p:spPr>
+        <p:txBody>
+          <a:bodyPr wrap="square" lIns="0" tIns="0" rIns="0" bIns="0" rtlCol="0" anchor="ctr"/>
+          <a:lstStyle/>
+          <a:p>
+            <a:pPr indent="0" marL="0">
+              <a:buNone/>
+            </a:pPr>
+            <a:r>
+              <a:rPr lang="en-US" sz="1600" dirty="0">
+                <a:solidFill>
+                  <a:srgbClr val="27303A"/>
+                </a:solidFill>
+              </a:rPr>
+              <a:t>Den privaten Schlüssel gibst du nie heraus. In Azure landet nur der öffentliche.</a:t>
+            </a:r>
+            <a:endParaRPr lang="en-US" sz="1600" dirty="0"/>
+          </a:p>
+        </p:txBody>
+      </p:sp>
+      <p:sp>
+        <p:nvSpPr>
+          <p:cNvPr id="25" name="Slide Number Placeholder 0"/>
+          <p:cNvSpPr>
+            <a:spLocks noGrp="1"/>
+          </p:cNvSpPr>
+          <p:nvPr>
+            <p:ph type="sldNum" sz="quarter" idx="4294967295"/>
+          </p:nvPr>
+        </p:nvSpPr>
+        <p:spPr>
+          <a:xfrm>
+            <a:off x="11183112" y="6336792"/>
+            <a:ext cx="457200" cy="365760"/>
+          </a:xfrm>
+          <a:prstGeom prst="rect">
+            <a:avLst/>
+          </a:prstGeom>
+          <a:extLst>
+            <a:ext uri="{C572A759-6A51-4108-AA02-DFA0A04FC94B}">
+              <ma14:wrappingTextBoxFlag xmlns:ma14="http://schemas.microsoft.com/office/mac/drawingml/2011/main" val="0"/>
+            </a:ext>
+          </a:extLst>
+        </p:spPr>
+        <p:txBody>
+          <a:bodyPr/>
+          <a:lstStyle>
+            <a:lvl1pPr>
+              <a:defRPr sz="1000">
+                <a:solidFill>
+                  <a:srgbClr val="6F6F6F"/>
+                </a:solidFill>
+              </a:defRPr>
+            </a:lvl1pPr>
+          </a:lstStyle>
+          <a:p>
+            <a:pPr algn="r"/>
+            <a:fld id="{F7021451-1387-4CA6-816F-3879F97B5CBC}" type="slidenum">
+              <a:rPr b="0" lang="en-US"/>
+              <a:t>7</a:t>
+            </a:fld>
+            <a:endParaRPr lang="en-US"/>
+          </a:p>
+        </p:txBody>
+      </p:sp>
+    </p:spTree>
+  </p:cSld>
+  <p:clrMapOvr>
+    <a:masterClrMapping/>
+  </p:clrMapOvr>
+</p:sld>
+</file>
+
+<file path=ppt/slides/slide8.xml><?xml version="1.0" encoding="utf-8"?>
+<p:sld xmlns:a="http://schemas.openxmlformats.org/drawingml/2006/main" xmlns:r="http://schemas.openxmlformats.org/officeDocument/2006/relationships" xmlns:p="http://schemas.openxmlformats.org/presentationml/2006/main">
+  <p:cSld name="Slide 8">
+    <p:spTree>
+      <p:nvGrpSpPr>
+        <p:cNvPr id="1" name=""/>
+        <p:cNvGrpSpPr/>
+        <p:nvPr/>
+      </p:nvGrpSpPr>
+      <p:grpSpPr>
+        <a:xfrm>
+          <a:off x="0" y="0"/>
+          <a:ext cx="0" cy="0"/>
+          <a:chOff x="0" y="0"/>
+          <a:chExt cx="0" cy="0"/>
+        </a:xfrm>
+      </p:grpSpPr>
+      <p:sp>
+        <p:nvSpPr>
+          <p:cNvPr id="2" name="Text 1"/>
+          <p:cNvSpPr/>
+          <p:nvPr>
+            <p:ph idx="102" type="title" hasCustomPrompt="1"/>
+          </p:nvPr>
+        </p:nvSpPr>
+        <p:spPr>
+          <a:xfrm>
+            <a:off x="548640" y="320040"/>
+            <a:ext cx="11094415" cy="822960"/>
+          </a:xfrm>
+          <a:prstGeom prst="rect">
+            <a:avLst/>
+          </a:prstGeom>
+          <a:noFill/>
+          <a:ln/>
+        </p:spPr>
+        <p:txBody>
+          <a:bodyPr wrap="square" lIns="0" tIns="0" rIns="0" bIns="0" rtlCol="0" anchor="ctr"/>
+          <a:lstStyle/>
+          <a:p>
+            <a:pPr algn="l" indent="0" marL="0">
+              <a:buNone/>
+            </a:pPr>
+            <a:r>
+              <a:rPr lang="en-US" sz="3400" b="1" dirty="0">
+                <a:solidFill>
+                  <a:srgbClr val="27303A"/>
+                </a:solidFill>
+              </a:rPr>
               <a:t>Wenn SSH nicht klappt</a:t>
             </a:r>
             <a:endParaRPr lang="en-US" sz="3400" dirty="0"/>
@@ -6461,7 +6989,7 @@
       </p:sp>
       <p:graphicFrame>
         <p:nvGraphicFramePr>
-          <p:cNvPr id="8" name="Table 0"/>
+          <p:cNvPr id="9" name="Table 0"/>
           <p:cNvGraphicFramePr>
             <a:graphicFrameLocks noGrp="1"/>
           </p:cNvGraphicFramePr>
@@ -7024,609 +7552,6 @@
             <a:pPr algn="r"/>
             <a:fld id="{F7021451-1387-4CA6-816F-3879F97B5CBC}" type="slidenum">
               <a:rPr b="0" lang="en-US"/>
-              <a:t>7</a:t>
-            </a:fld>
-            <a:endParaRPr lang="en-US"/>
-          </a:p>
-        </p:txBody>
-      </p:sp>
-    </p:spTree>
-  </p:cSld>
-  <p:clrMapOvr>
-    <a:masterClrMapping/>
-  </p:clrMapOvr>
-</p:sld>
-</file>
-
-<file path=ppt/slides/slide8.xml><?xml version="1.0" encoding="utf-8"?>
-<p:sld xmlns:a="http://schemas.openxmlformats.org/drawingml/2006/main" xmlns:r="http://schemas.openxmlformats.org/officeDocument/2006/relationships" xmlns:p="http://schemas.openxmlformats.org/presentationml/2006/main">
-  <p:cSld name="Slide 8">
-    <p:spTree>
-      <p:nvGrpSpPr>
-        <p:cNvPr id="1" name=""/>
-        <p:cNvGrpSpPr/>
-        <p:nvPr/>
-      </p:nvGrpSpPr>
-      <p:grpSpPr>
-        <a:xfrm>
-          <a:off x="0" y="0"/>
-          <a:ext cx="0" cy="0"/>
-          <a:chOff x="0" y="0"/>
-          <a:chExt cx="0" cy="0"/>
-        </a:xfrm>
-      </p:grpSpPr>
-      <p:sp>
-        <p:nvSpPr>
-          <p:cNvPr id="2" name="Text 1"/>
-          <p:cNvSpPr/>
-          <p:nvPr>
-            <p:ph idx="102" type="title" hasCustomPrompt="1"/>
-          </p:nvPr>
-        </p:nvSpPr>
-        <p:spPr>
-          <a:xfrm>
-            <a:off x="548640" y="320040"/>
-            <a:ext cx="11094415" cy="822960"/>
-          </a:xfrm>
-          <a:prstGeom prst="rect">
-            <a:avLst/>
-          </a:prstGeom>
-          <a:noFill/>
-          <a:ln/>
-        </p:spPr>
-        <p:txBody>
-          <a:bodyPr wrap="square" lIns="0" tIns="0" rIns="0" bIns="0" rtlCol="0" anchor="ctr"/>
-          <a:lstStyle/>
-          <a:p>
-            <a:pPr algn="l" indent="0" marL="0">
-              <a:buNone/>
-            </a:pPr>
-            <a:r>
-              <a:rPr lang="en-US" sz="3400" b="1" dirty="0">
-                <a:solidFill>
-                  <a:srgbClr val="27303A"/>
-                </a:solidFill>
-              </a:rPr>
-              <a:t>Selbsttest</a:t>
-            </a:r>
-            <a:endParaRPr lang="en-US" sz="3400" dirty="0"/>
-          </a:p>
-        </p:txBody>
-      </p:sp>
-      <p:sp>
-        <p:nvSpPr>
-          <p:cNvPr id="3" name="Text 1"/>
-          <p:cNvSpPr txBox="1"/>
-          <p:nvPr/>
-        </p:nvSpPr>
-        <p:spPr>
-          <a:xfrm>
-            <a:off x="548640" y="1325880"/>
-            <a:ext cx="11094415" cy="457200"/>
-          </a:xfrm>
-          <a:prstGeom prst="rect">
-            <a:avLst/>
-          </a:prstGeom>
-          <a:noFill/>
-          <a:ln/>
-        </p:spPr>
-        <p:txBody>
-          <a:bodyPr wrap="square" lIns="0" tIns="0" rIns="0" bIns="0" rtlCol="0" anchor="ctr"/>
-          <a:lstStyle/>
-          <a:p>
-            <a:pPr indent="0" marL="0">
-              <a:buNone/>
-            </a:pPr>
-            <a:r>
-              <a:rPr lang="en-US" sz="1600" dirty="0">
-                <a:solidFill>
-                  <a:srgbClr val="6F6F6F"/>
-                </a:solidFill>
-              </a:rPr>
-              <a:t>Erst selbst überlegen, dann mit dem Nachbarn vergleichen.</a:t>
-            </a:r>
-            <a:endParaRPr lang="en-US" sz="1600" dirty="0"/>
-          </a:p>
-        </p:txBody>
-      </p:sp>
-      <p:sp>
-        <p:nvSpPr>
-          <p:cNvPr id="4" name="karte"/>
-          <p:cNvSpPr/>
-          <p:nvPr/>
-        </p:nvSpPr>
-        <p:spPr>
-          <a:xfrm>
-            <a:off x="548640" y="2743200"/>
-            <a:ext cx="3515258" cy="2468880"/>
-          </a:xfrm>
-          <a:prstGeom prst="roundRect">
-            <a:avLst>
-              <a:gd name="adj" fmla="val 4444"/>
-            </a:avLst>
-          </a:prstGeom>
-          <a:solidFill>
-            <a:srgbClr val="F7F7F7"/>
-          </a:solidFill>
-          <a:ln w="12700">
-            <a:solidFill>
-              <a:srgbClr val="F7F7F7"/>
-            </a:solidFill>
-            <a:prstDash val="solid"/>
-          </a:ln>
-        </p:spPr>
-      </p:sp>
-      <p:sp>
-        <p:nvSpPr>
-          <p:cNvPr id="5" name="icon-kreis-FaQuestionCircle"/>
-          <p:cNvSpPr/>
-          <p:nvPr/>
-        </p:nvSpPr>
-        <p:spPr>
-          <a:xfrm>
-            <a:off x="822960" y="3017520"/>
-            <a:ext cx="640080" cy="640080"/>
-          </a:xfrm>
-          <a:prstGeom prst="ellipse">
-            <a:avLst/>
-          </a:prstGeom>
-          <a:solidFill>
-            <a:srgbClr val="006FAD"/>
-          </a:solidFill>
-          <a:ln w="12700">
-            <a:solidFill>
-              <a:srgbClr val="006FAD"/>
-            </a:solidFill>
-            <a:prstDash val="solid"/>
-          </a:ln>
-        </p:spPr>
-      </p:sp>
-      <p:pic>
-        <p:nvPicPr>
-          <p:cNvPr id="6" name="icon-FaQuestionCircle" descr="C:\Users\Thanam\AppData\Local\Temp\claude\c--Projekt-Trainings-azure-basics-training\a7a6b8eb-22f3-4b42-aecc-5af05d1502b1\scratchpad\folien\assets\icons\FaQuestionCircle.png">    </p:cNvPr>
-          <p:cNvPicPr>
-            <a:picLocks noChangeAspect="1"/>
-          </p:cNvPicPr>
-          <p:nvPr/>
-        </p:nvPicPr>
-        <p:blipFill>
-          <a:blip r:embed="rId1"/>
-          <a:stretch>
-            <a:fillRect/>
-          </a:stretch>
-        </p:blipFill>
-        <p:spPr>
-          <a:xfrm>
-            <a:off x="976579" y="3171139"/>
-            <a:ext cx="332842" cy="332842"/>
-          </a:xfrm>
-          <a:prstGeom prst="rect">
-            <a:avLst/>
-          </a:prstGeom>
-        </p:spPr>
-      </p:pic>
-      <p:sp>
-        <p:nvSpPr>
-          <p:cNvPr id="7" name="Text 4"/>
-          <p:cNvSpPr txBox="1"/>
-          <p:nvPr/>
-        </p:nvSpPr>
-        <p:spPr>
-          <a:xfrm>
-            <a:off x="1645920" y="3017520"/>
-            <a:ext cx="2189378" cy="640080"/>
-          </a:xfrm>
-          <a:prstGeom prst="rect">
-            <a:avLst/>
-          </a:prstGeom>
-          <a:noFill/>
-          <a:ln/>
-        </p:spPr>
-        <p:txBody>
-          <a:bodyPr wrap="square" lIns="0" tIns="0" rIns="0" bIns="0" rtlCol="0" anchor="ctr">
-            <a:normAutofit/>
-          </a:bodyPr>
-          <a:lstStyle/>
-          <a:p>
-            <a:pPr indent="0" marL="0">
-              <a:buNone/>
-            </a:pPr>
-            <a:r>
-              <a:rPr lang="en-US" sz="2000" b="1" dirty="0">
-                <a:solidFill>
-                  <a:srgbClr val="27303A"/>
-                </a:solidFill>
-              </a:rPr>
-              <a:t>Bestandteile</a:t>
-            </a:r>
-            <a:endParaRPr lang="en-US" sz="2000" dirty="0"/>
-          </a:p>
-        </p:txBody>
-      </p:sp>
-      <p:sp>
-        <p:nvSpPr>
-          <p:cNvPr id="8" name="Text 5"/>
-          <p:cNvSpPr txBox="1"/>
-          <p:nvPr/>
-        </p:nvSpPr>
-        <p:spPr>
-          <a:xfrm>
-            <a:off x="822960" y="3840480"/>
-            <a:ext cx="2966618" cy="1234440"/>
-          </a:xfrm>
-          <a:prstGeom prst="rect">
-            <a:avLst/>
-          </a:prstGeom>
-          <a:noFill/>
-          <a:ln/>
-        </p:spPr>
-        <p:txBody>
-          <a:bodyPr wrap="square" lIns="0" tIns="0" rIns="0" bIns="0" rtlCol="0" anchor="t"/>
-          <a:lstStyle/>
-          <a:p>
-            <a:pPr indent="0" marL="0">
-              <a:spcAft>
-                <a:spcPts val="400"/>
-              </a:spcAft>
-              <a:buNone/>
-            </a:pPr>
-            <a:r>
-              <a:rPr lang="en-US" sz="1600" dirty="0">
-                <a:solidFill>
-                  <a:srgbClr val="27303A"/>
-                </a:solidFill>
-              </a:rPr>
-              <a:t>Welche Ressourcen findest du nach dem Erstellen einer VM in der Ressourcengruppe?</a:t>
-            </a:r>
-            <a:endParaRPr lang="en-US" sz="1600" dirty="0"/>
-          </a:p>
-        </p:txBody>
-      </p:sp>
-      <p:sp>
-        <p:nvSpPr>
-          <p:cNvPr id="9" name="karte"/>
-          <p:cNvSpPr/>
-          <p:nvPr/>
-        </p:nvSpPr>
-        <p:spPr>
-          <a:xfrm>
-            <a:off x="4338218" y="2743200"/>
-            <a:ext cx="3515258" cy="2468880"/>
-          </a:xfrm>
-          <a:prstGeom prst="roundRect">
-            <a:avLst>
-              <a:gd name="adj" fmla="val 4444"/>
-            </a:avLst>
-          </a:prstGeom>
-          <a:solidFill>
-            <a:srgbClr val="F7F7F7"/>
-          </a:solidFill>
-          <a:ln w="12700">
-            <a:solidFill>
-              <a:srgbClr val="F7F7F7"/>
-            </a:solidFill>
-            <a:prstDash val="solid"/>
-          </a:ln>
-        </p:spPr>
-      </p:sp>
-      <p:sp>
-        <p:nvSpPr>
-          <p:cNvPr id="10" name="icon-kreis-FaQuestionCircle"/>
-          <p:cNvSpPr/>
-          <p:nvPr/>
-        </p:nvSpPr>
-        <p:spPr>
-          <a:xfrm>
-            <a:off x="4612538" y="3017520"/>
-            <a:ext cx="640080" cy="640080"/>
-          </a:xfrm>
-          <a:prstGeom prst="ellipse">
-            <a:avLst/>
-          </a:prstGeom>
-          <a:solidFill>
-            <a:srgbClr val="006FAD"/>
-          </a:solidFill>
-          <a:ln w="12700">
-            <a:solidFill>
-              <a:srgbClr val="006FAD"/>
-            </a:solidFill>
-            <a:prstDash val="solid"/>
-          </a:ln>
-        </p:spPr>
-      </p:sp>
-      <p:pic>
-        <p:nvPicPr>
-          <p:cNvPr id="11" name="icon-FaQuestionCircle" descr="C:\Users\Thanam\AppData\Local\Temp\claude\c--Projekt-Trainings-azure-basics-training\a7a6b8eb-22f3-4b42-aecc-5af05d1502b1\scratchpad\folien\assets\icons\FaQuestionCircle.png">    </p:cNvPr>
-          <p:cNvPicPr>
-            <a:picLocks noChangeAspect="1"/>
-          </p:cNvPicPr>
-          <p:nvPr/>
-        </p:nvPicPr>
-        <p:blipFill>
-          <a:blip r:embed="rId2"/>
-          <a:stretch>
-            <a:fillRect/>
-          </a:stretch>
-        </p:blipFill>
-        <p:spPr>
-          <a:xfrm>
-            <a:off x="4766158" y="3171139"/>
-            <a:ext cx="332842" cy="332842"/>
-          </a:xfrm>
-          <a:prstGeom prst="rect">
-            <a:avLst/>
-          </a:prstGeom>
-        </p:spPr>
-      </p:pic>
-      <p:sp>
-        <p:nvSpPr>
-          <p:cNvPr id="12" name="Text 8"/>
-          <p:cNvSpPr txBox="1"/>
-          <p:nvPr/>
-        </p:nvSpPr>
-        <p:spPr>
-          <a:xfrm>
-            <a:off x="5435498" y="3017520"/>
-            <a:ext cx="2189378" cy="640080"/>
-          </a:xfrm>
-          <a:prstGeom prst="rect">
-            <a:avLst/>
-          </a:prstGeom>
-          <a:noFill/>
-          <a:ln/>
-        </p:spPr>
-        <p:txBody>
-          <a:bodyPr wrap="square" lIns="0" tIns="0" rIns="0" bIns="0" rtlCol="0" anchor="ctr">
-            <a:normAutofit/>
-          </a:bodyPr>
-          <a:lstStyle/>
-          <a:p>
-            <a:pPr indent="0" marL="0">
-              <a:buNone/>
-            </a:pPr>
-            <a:r>
-              <a:rPr lang="en-US" sz="2000" b="1" dirty="0">
-                <a:solidFill>
-                  <a:srgbClr val="27303A"/>
-                </a:solidFill>
-              </a:rPr>
-              <a:t>Kosten</a:t>
-            </a:r>
-            <a:endParaRPr lang="en-US" sz="2000" dirty="0"/>
-          </a:p>
-        </p:txBody>
-      </p:sp>
-      <p:sp>
-        <p:nvSpPr>
-          <p:cNvPr id="13" name="Text 9"/>
-          <p:cNvSpPr txBox="1"/>
-          <p:nvPr/>
-        </p:nvSpPr>
-        <p:spPr>
-          <a:xfrm>
-            <a:off x="4612538" y="3840480"/>
-            <a:ext cx="2966618" cy="1234440"/>
-          </a:xfrm>
-          <a:prstGeom prst="rect">
-            <a:avLst/>
-          </a:prstGeom>
-          <a:noFill/>
-          <a:ln/>
-        </p:spPr>
-        <p:txBody>
-          <a:bodyPr wrap="square" lIns="0" tIns="0" rIns="0" bIns="0" rtlCol="0" anchor="t"/>
-          <a:lstStyle/>
-          <a:p>
-            <a:pPr indent="0" marL="0">
-              <a:spcAft>
-                <a:spcPts val="400"/>
-              </a:spcAft>
-              <a:buNone/>
-            </a:pPr>
-            <a:r>
-              <a:rPr lang="en-US" sz="1600" dirty="0">
-                <a:solidFill>
-                  <a:srgbClr val="27303A"/>
-                </a:solidFill>
-              </a:rPr>
-              <a:t>Kostet die VM nach sudo poweroff noch etwas?</a:t>
-            </a:r>
-            <a:endParaRPr lang="en-US" sz="1600" dirty="0"/>
-          </a:p>
-        </p:txBody>
-      </p:sp>
-      <p:sp>
-        <p:nvSpPr>
-          <p:cNvPr id="14" name="karte"/>
-          <p:cNvSpPr/>
-          <p:nvPr/>
-        </p:nvSpPr>
-        <p:spPr>
-          <a:xfrm>
-            <a:off x="8127797" y="2743200"/>
-            <a:ext cx="3515258" cy="2468880"/>
-          </a:xfrm>
-          <a:prstGeom prst="roundRect">
-            <a:avLst>
-              <a:gd name="adj" fmla="val 4444"/>
-            </a:avLst>
-          </a:prstGeom>
-          <a:solidFill>
-            <a:srgbClr val="F7F7F7"/>
-          </a:solidFill>
-          <a:ln w="12700">
-            <a:solidFill>
-              <a:srgbClr val="F7F7F7"/>
-            </a:solidFill>
-            <a:prstDash val="solid"/>
-          </a:ln>
-        </p:spPr>
-      </p:sp>
-      <p:sp>
-        <p:nvSpPr>
-          <p:cNvPr id="15" name="icon-kreis-FaQuestionCircle"/>
-          <p:cNvSpPr/>
-          <p:nvPr/>
-        </p:nvSpPr>
-        <p:spPr>
-          <a:xfrm>
-            <a:off x="8402117" y="3017520"/>
-            <a:ext cx="640080" cy="640080"/>
-          </a:xfrm>
-          <a:prstGeom prst="ellipse">
-            <a:avLst/>
-          </a:prstGeom>
-          <a:solidFill>
-            <a:srgbClr val="006FAD"/>
-          </a:solidFill>
-          <a:ln w="12700">
-            <a:solidFill>
-              <a:srgbClr val="006FAD"/>
-            </a:solidFill>
-            <a:prstDash val="solid"/>
-          </a:ln>
-        </p:spPr>
-      </p:sp>
-      <p:pic>
-        <p:nvPicPr>
-          <p:cNvPr id="16" name="icon-FaQuestionCircle" descr="C:\Users\Thanam\AppData\Local\Temp\claude\c--Projekt-Trainings-azure-basics-training\a7a6b8eb-22f3-4b42-aecc-5af05d1502b1\scratchpad\folien\assets\icons\FaQuestionCircle.png">    </p:cNvPr>
-          <p:cNvPicPr>
-            <a:picLocks noChangeAspect="1"/>
-          </p:cNvPicPr>
-          <p:nvPr/>
-        </p:nvPicPr>
-        <p:blipFill>
-          <a:blip r:embed="rId3"/>
-          <a:stretch>
-            <a:fillRect/>
-          </a:stretch>
-        </p:blipFill>
-        <p:spPr>
-          <a:xfrm>
-            <a:off x="8555736" y="3171139"/>
-            <a:ext cx="332842" cy="332842"/>
-          </a:xfrm>
-          <a:prstGeom prst="rect">
-            <a:avLst/>
-          </a:prstGeom>
-        </p:spPr>
-      </p:pic>
-      <p:sp>
-        <p:nvSpPr>
-          <p:cNvPr id="17" name="Text 12"/>
-          <p:cNvSpPr txBox="1"/>
-          <p:nvPr/>
-        </p:nvSpPr>
-        <p:spPr>
-          <a:xfrm>
-            <a:off x="9225077" y="3017520"/>
-            <a:ext cx="2189378" cy="640080"/>
-          </a:xfrm>
-          <a:prstGeom prst="rect">
-            <a:avLst/>
-          </a:prstGeom>
-          <a:noFill/>
-          <a:ln/>
-        </p:spPr>
-        <p:txBody>
-          <a:bodyPr wrap="square" lIns="0" tIns="0" rIns="0" bIns="0" rtlCol="0" anchor="ctr">
-            <a:normAutofit/>
-          </a:bodyPr>
-          <a:lstStyle/>
-          <a:p>
-            <a:pPr indent="0" marL="0">
-              <a:buNone/>
-            </a:pPr>
-            <a:r>
-              <a:rPr lang="en-US" sz="2000" b="1" dirty="0">
-                <a:solidFill>
-                  <a:srgbClr val="27303A"/>
-                </a:solidFill>
-              </a:rPr>
-              <a:t>Grösse</a:t>
-            </a:r>
-            <a:endParaRPr lang="en-US" sz="2000" dirty="0"/>
-          </a:p>
-        </p:txBody>
-      </p:sp>
-      <p:sp>
-        <p:nvSpPr>
-          <p:cNvPr id="18" name="Text 13"/>
-          <p:cNvSpPr txBox="1"/>
-          <p:nvPr/>
-        </p:nvSpPr>
-        <p:spPr>
-          <a:xfrm>
-            <a:off x="8402117" y="3840480"/>
-            <a:ext cx="2966618" cy="1234440"/>
-          </a:xfrm>
-          <a:prstGeom prst="rect">
-            <a:avLst/>
-          </a:prstGeom>
-          <a:noFill/>
-          <a:ln/>
-        </p:spPr>
-        <p:txBody>
-          <a:bodyPr wrap="square" lIns="0" tIns="0" rIns="0" bIns="0" rtlCol="0" anchor="t"/>
-          <a:lstStyle/>
-          <a:p>
-            <a:pPr indent="0" marL="0">
-              <a:spcAft>
-                <a:spcPts val="400"/>
-              </a:spcAft>
-              <a:buNone/>
-            </a:pPr>
-            <a:r>
-              <a:rPr lang="en-US" sz="1600" dirty="0">
-                <a:solidFill>
-                  <a:srgbClr val="27303A"/>
-                </a:solidFill>
-              </a:rPr>
-              <a:t>Was bedeutet die 2 in Standard_B2s?</a:t>
-            </a:r>
-            <a:endParaRPr lang="en-US" sz="1600" dirty="0"/>
-          </a:p>
-        </p:txBody>
-      </p:sp>
-      <p:sp>
-        <p:nvSpPr>
-          <p:cNvPr id="25" name="Slide Number Placeholder 0"/>
-          <p:cNvSpPr>
-            <a:spLocks noGrp="1"/>
-          </p:cNvSpPr>
-          <p:nvPr>
-            <p:ph type="sldNum" sz="quarter" idx="4294967295"/>
-          </p:nvPr>
-        </p:nvSpPr>
-        <p:spPr>
-          <a:xfrm>
-            <a:off x="11183112" y="6336792"/>
-            <a:ext cx="457200" cy="365760"/>
-          </a:xfrm>
-          <a:prstGeom prst="rect">
-            <a:avLst/>
-          </a:prstGeom>
-          <a:extLst>
-            <a:ext uri="{C572A759-6A51-4108-AA02-DFA0A04FC94B}">
-              <ma14:wrappingTextBoxFlag xmlns:ma14="http://schemas.microsoft.com/office/mac/drawingml/2011/main" val="0"/>
-            </a:ext>
-          </a:extLst>
-        </p:spPr>
-        <p:txBody>
-          <a:bodyPr/>
-          <a:lstStyle>
-            <a:lvl1pPr>
-              <a:defRPr sz="1000">
-                <a:solidFill>
-                  <a:srgbClr val="6F6F6F"/>
-                </a:solidFill>
-              </a:defRPr>
-            </a:lvl1pPr>
-          </a:lstStyle>
-          <a:p>
-            <a:pPr algn="r"/>
-            <a:fld id="{F7021451-1387-4CA6-816F-3879F97B5CBC}" type="slidenum">
-              <a:rPr b="0" lang="en-US"/>
               <a:t>8</a:t>
             </a:fld>
             <a:endParaRPr lang="en-US"/>
@@ -7690,7 +7615,7 @@
                   <a:srgbClr val="27303A"/>
                 </a:solidFill>
               </a:rPr>
-              <a:t>Zum Nachlesen</a:t>
+              <a:t>Selbsttest</a:t>
             </a:r>
             <a:endParaRPr lang="en-US" sz="3400" dirty="0"/>
           </a:p>
@@ -7698,14 +7623,77 @@
       </p:sp>
       <p:sp>
         <p:nvSpPr>
-          <p:cNvPr id="3" name="icon-kreis-FaBook"/>
+          <p:cNvPr id="3" name="Text 1"/>
+          <p:cNvSpPr txBox="1"/>
+          <p:nvPr/>
+        </p:nvSpPr>
+        <p:spPr>
+          <a:xfrm>
+            <a:off x="548640" y="1325880"/>
+            <a:ext cx="11094415" cy="457200"/>
+          </a:xfrm>
+          <a:prstGeom prst="rect">
+            <a:avLst/>
+          </a:prstGeom>
+          <a:noFill/>
+          <a:ln/>
+        </p:spPr>
+        <p:txBody>
+          <a:bodyPr wrap="square" lIns="0" tIns="0" rIns="0" bIns="0" rtlCol="0" anchor="ctr"/>
+          <a:lstStyle/>
+          <a:p>
+            <a:pPr indent="0" marL="0">
+              <a:buNone/>
+            </a:pPr>
+            <a:r>
+              <a:rPr lang="en-US" sz="1600" dirty="0">
+                <a:solidFill>
+                  <a:srgbClr val="6F6F6F"/>
+                </a:solidFill>
+              </a:rPr>
+              <a:t>Erst selbst überlegen, dann mit dem Nachbarn vergleichen.</a:t>
+            </a:r>
+            <a:endParaRPr lang="en-US" sz="1600" dirty="0"/>
+          </a:p>
+        </p:txBody>
+      </p:sp>
+      <p:sp>
+        <p:nvSpPr>
+          <p:cNvPr id="4" name="karte"/>
           <p:cNvSpPr/>
           <p:nvPr/>
         </p:nvSpPr>
         <p:spPr>
           <a:xfrm>
-            <a:off x="548640" y="2926080"/>
-            <a:ext cx="548640" cy="548640"/>
+            <a:off x="548640" y="2743200"/>
+            <a:ext cx="3515258" cy="2468880"/>
+          </a:xfrm>
+          <a:prstGeom prst="roundRect">
+            <a:avLst>
+              <a:gd name="adj" fmla="val 4444"/>
+            </a:avLst>
+          </a:prstGeom>
+          <a:solidFill>
+            <a:srgbClr val="F7F7F7"/>
+          </a:solidFill>
+          <a:ln w="12700">
+            <a:solidFill>
+              <a:srgbClr val="F7F7F7"/>
+            </a:solidFill>
+            <a:prstDash val="solid"/>
+          </a:ln>
+        </p:spPr>
+      </p:sp>
+      <p:sp>
+        <p:nvSpPr>
+          <p:cNvPr id="5" name="icon-kreis-FaQuestionCircle"/>
+          <p:cNvSpPr/>
+          <p:nvPr/>
+        </p:nvSpPr>
+        <p:spPr>
+          <a:xfrm>
+            <a:off x="822960" y="3017520"/>
+            <a:ext cx="640080" cy="640080"/>
           </a:xfrm>
           <a:prstGeom prst="ellipse">
             <a:avLst/>
@@ -7723,7 +7711,7 @@
       </p:sp>
       <p:pic>
         <p:nvPicPr>
-          <p:cNvPr id="4" name="icon-FaBook" descr="C:\Users\Thanam\AppData\Local\Temp\claude\c--Projekt-Trainings-azure-basics-training\a7a6b8eb-22f3-4b42-aecc-5af05d1502b1\scratchpad\folien\assets\icons\FaBook.png">    </p:cNvPr>
+          <p:cNvPr id="6" name="icon-FaQuestionCircle" descr="C:\Users\Thanam\AppData\Local\Temp\claude\c--Projekt-Trainings-azure-basics-training\d01384da-f513-40b3-985e-441cf1c86f9e\scratchpad\arbeit\assets\icons\FaQuestionCircle.png">    </p:cNvPr>
           <p:cNvPicPr>
             <a:picLocks noChangeAspect="1"/>
           </p:cNvPicPr>
@@ -7737,8 +7725,8 @@
         </p:blipFill>
         <p:spPr>
           <a:xfrm>
-            <a:off x="680314" y="3057754"/>
-            <a:ext cx="285293" cy="285293"/>
+            <a:off x="976579" y="3171139"/>
+            <a:ext cx="332842" cy="332842"/>
           </a:xfrm>
           <a:prstGeom prst="rect">
             <a:avLst/>
@@ -7747,14 +7735,14 @@
       </p:pic>
       <p:sp>
         <p:nvSpPr>
-          <p:cNvPr id="5" name="Text 2"/>
+          <p:cNvPr id="7" name="Text 4"/>
           <p:cNvSpPr txBox="1"/>
           <p:nvPr/>
         </p:nvSpPr>
         <p:spPr>
           <a:xfrm>
-            <a:off x="1325880" y="2720340"/>
-            <a:ext cx="10317175" cy="960120"/>
+            <a:off x="1645920" y="3017520"/>
+            <a:ext cx="2189378" cy="640080"/>
           </a:xfrm>
           <a:prstGeom prst="rect">
             <a:avLst/>
@@ -7763,48 +7751,102 @@
           <a:ln/>
         </p:spPr>
         <p:txBody>
-          <a:bodyPr wrap="square" lIns="0" tIns="0" rIns="0" bIns="0" rtlCol="0" anchor="ctr"/>
+          <a:bodyPr wrap="square" lIns="0" tIns="0" rIns="0" bIns="0" rtlCol="0" anchor="ctr">
+            <a:normAutofit/>
+          </a:bodyPr>
           <a:lstStyle/>
           <a:p>
             <a:pPr indent="0" marL="0">
               <a:buNone/>
             </a:pPr>
             <a:r>
-              <a:rPr lang="en-US" sz="1800" b="1" dirty="0">
+              <a:rPr lang="en-US" sz="2000" b="1" dirty="0">
                 <a:solidFill>
                   <a:srgbClr val="27303A"/>
                 </a:solidFill>
               </a:rPr>
-              <a:t>Theorie im Repository</a:t>
+              <a:t>Bestandteile</a:t>
             </a:r>
-            <a:endParaRPr lang="en-US" sz="1800" dirty="0"/>
-          </a:p>
+            <a:endParaRPr lang="en-US" sz="2000" dirty="0"/>
+          </a:p>
+        </p:txBody>
+      </p:sp>
+      <p:sp>
+        <p:nvSpPr>
+          <p:cNvPr id="8" name="Text 5"/>
+          <p:cNvSpPr txBox="1"/>
+          <p:nvPr/>
+        </p:nvSpPr>
+        <p:spPr>
+          <a:xfrm>
+            <a:off x="822960" y="3840480"/>
+            <a:ext cx="2966618" cy="1234440"/>
+          </a:xfrm>
+          <a:prstGeom prst="rect">
+            <a:avLst/>
+          </a:prstGeom>
+          <a:noFill/>
+          <a:ln/>
+        </p:spPr>
+        <p:txBody>
+          <a:bodyPr wrap="square" lIns="0" tIns="0" rIns="0" bIns="0" rtlCol="0" anchor="t"/>
+          <a:lstStyle/>
           <a:p>
             <a:pPr indent="0" marL="0">
+              <a:spcAft>
+                <a:spcPts val="400"/>
+              </a:spcAft>
               <a:buNone/>
             </a:pPr>
             <a:r>
-              <a:rPr lang="en-US" sz="1800" dirty="0">
+              <a:rPr lang="en-US" sz="1600" dirty="0">
                 <a:solidFill>
-                  <a:srgbClr val="6F6F6F"/>
+                  <a:srgbClr val="27303A"/>
                 </a:solidFill>
               </a:rPr>
-              <a:t>theorie/04-azure-compute.md</a:t>
+              <a:t>Welche Ressourcen findest du nach dem Erstellen einer VM in der Ressourcengruppe?</a:t>
             </a:r>
-            <a:endParaRPr lang="en-US" sz="1800" dirty="0"/>
-          </a:p>
-        </p:txBody>
-      </p:sp>
-      <p:sp>
-        <p:nvSpPr>
-          <p:cNvPr id="6" name="icon-kreis-FaGraduationCap"/>
+            <a:endParaRPr lang="en-US" sz="1600" dirty="0"/>
+          </a:p>
+        </p:txBody>
+      </p:sp>
+      <p:sp>
+        <p:nvSpPr>
+          <p:cNvPr id="9" name="karte"/>
           <p:cNvSpPr/>
           <p:nvPr/>
         </p:nvSpPr>
         <p:spPr>
           <a:xfrm>
-            <a:off x="548640" y="3886200"/>
-            <a:ext cx="548640" cy="548640"/>
+            <a:off x="4338218" y="2743200"/>
+            <a:ext cx="3515258" cy="2468880"/>
+          </a:xfrm>
+          <a:prstGeom prst="roundRect">
+            <a:avLst>
+              <a:gd name="adj" fmla="val 4444"/>
+            </a:avLst>
+          </a:prstGeom>
+          <a:solidFill>
+            <a:srgbClr val="F7F7F7"/>
+          </a:solidFill>
+          <a:ln w="12700">
+            <a:solidFill>
+              <a:srgbClr val="F7F7F7"/>
+            </a:solidFill>
+            <a:prstDash val="solid"/>
+          </a:ln>
+        </p:spPr>
+      </p:sp>
+      <p:sp>
+        <p:nvSpPr>
+          <p:cNvPr id="10" name="icon-kreis-FaQuestionCircle"/>
+          <p:cNvSpPr/>
+          <p:nvPr/>
+        </p:nvSpPr>
+        <p:spPr>
+          <a:xfrm>
+            <a:off x="4612538" y="3017520"/>
+            <a:ext cx="640080" cy="640080"/>
           </a:xfrm>
           <a:prstGeom prst="ellipse">
             <a:avLst/>
@@ -7822,7 +7864,7 @@
       </p:sp>
       <p:pic>
         <p:nvPicPr>
-          <p:cNvPr id="7" name="icon-FaGraduationCap" descr="C:\Users\Thanam\AppData\Local\Temp\claude\c--Projekt-Trainings-azure-basics-training\a7a6b8eb-22f3-4b42-aecc-5af05d1502b1\scratchpad\folien\assets\icons\FaGraduationCap.png">    </p:cNvPr>
+          <p:cNvPr id="11" name="icon-FaQuestionCircle" descr="C:\Users\Thanam\AppData\Local\Temp\claude\c--Projekt-Trainings-azure-basics-training\d01384da-f513-40b3-985e-441cf1c86f9e\scratchpad\arbeit\assets\icons\FaQuestionCircle.png">    </p:cNvPr>
           <p:cNvPicPr>
             <a:picLocks noChangeAspect="1"/>
           </p:cNvPicPr>
@@ -7836,8 +7878,8 @@
         </p:blipFill>
         <p:spPr>
           <a:xfrm>
-            <a:off x="680314" y="4017874"/>
-            <a:ext cx="285293" cy="285293"/>
+            <a:off x="4766158" y="3171139"/>
+            <a:ext cx="332842" cy="332842"/>
           </a:xfrm>
           <a:prstGeom prst="rect">
             <a:avLst/>
@@ -7846,14 +7888,14 @@
       </p:pic>
       <p:sp>
         <p:nvSpPr>
-          <p:cNvPr id="8" name="Text 4"/>
+          <p:cNvPr id="12" name="Text 8"/>
           <p:cNvSpPr txBox="1"/>
           <p:nvPr/>
         </p:nvSpPr>
         <p:spPr>
           <a:xfrm>
-            <a:off x="1325880" y="3680460"/>
-            <a:ext cx="10317175" cy="960120"/>
+            <a:off x="5435498" y="3017520"/>
+            <a:ext cx="2189378" cy="640080"/>
           </a:xfrm>
           <a:prstGeom prst="rect">
             <a:avLst/>
@@ -7862,35 +7904,215 @@
           <a:ln/>
         </p:spPr>
         <p:txBody>
-          <a:bodyPr wrap="square" lIns="0" tIns="0" rIns="0" bIns="0" rtlCol="0" anchor="ctr"/>
+          <a:bodyPr wrap="square" lIns="0" tIns="0" rIns="0" bIns="0" rtlCol="0" anchor="ctr">
+            <a:normAutofit/>
+          </a:bodyPr>
           <a:lstStyle/>
           <a:p>
             <a:pPr indent="0" marL="0">
               <a:buNone/>
             </a:pPr>
             <a:r>
-              <a:rPr lang="en-US" sz="1800" b="1" dirty="0">
+              <a:rPr lang="en-US" sz="2000" b="1" dirty="0">
                 <a:solidFill>
                   <a:srgbClr val="27303A"/>
                 </a:solidFill>
               </a:rPr>
-              <a:t>Microsoft Learn</a:t>
+              <a:t>Kosten</a:t>
             </a:r>
-            <a:endParaRPr lang="en-US" sz="1800" dirty="0"/>
-          </a:p>
+            <a:endParaRPr lang="en-US" sz="2000" dirty="0"/>
+          </a:p>
+        </p:txBody>
+      </p:sp>
+      <p:sp>
+        <p:nvSpPr>
+          <p:cNvPr id="13" name="Text 9"/>
+          <p:cNvSpPr txBox="1"/>
+          <p:nvPr/>
+        </p:nvSpPr>
+        <p:spPr>
+          <a:xfrm>
+            <a:off x="4612538" y="3840480"/>
+            <a:ext cx="2966618" cy="1234440"/>
+          </a:xfrm>
+          <a:prstGeom prst="rect">
+            <a:avLst/>
+          </a:prstGeom>
+          <a:noFill/>
+          <a:ln/>
+        </p:spPr>
+        <p:txBody>
+          <a:bodyPr wrap="square" lIns="0" tIns="0" rIns="0" bIns="0" rtlCol="0" anchor="t"/>
+          <a:lstStyle/>
+          <a:p>
+            <a:pPr indent="0" marL="0">
+              <a:spcAft>
+                <a:spcPts val="400"/>
+              </a:spcAft>
+              <a:buNone/>
+            </a:pPr>
+            <a:r>
+              <a:rPr lang="en-US" sz="1600" dirty="0">
+                <a:solidFill>
+                  <a:srgbClr val="27303A"/>
+                </a:solidFill>
+              </a:rPr>
+              <a:t>Kostet die VM nach sudo poweroff noch etwas?</a:t>
+            </a:r>
+            <a:endParaRPr lang="en-US" sz="1600" dirty="0"/>
+          </a:p>
+        </p:txBody>
+      </p:sp>
+      <p:sp>
+        <p:nvSpPr>
+          <p:cNvPr id="14" name="karte"/>
+          <p:cNvSpPr/>
+          <p:nvPr/>
+        </p:nvSpPr>
+        <p:spPr>
+          <a:xfrm>
+            <a:off x="8127797" y="2743200"/>
+            <a:ext cx="3515258" cy="2468880"/>
+          </a:xfrm>
+          <a:prstGeom prst="roundRect">
+            <a:avLst>
+              <a:gd name="adj" fmla="val 4444"/>
+            </a:avLst>
+          </a:prstGeom>
+          <a:solidFill>
+            <a:srgbClr val="F7F7F7"/>
+          </a:solidFill>
+          <a:ln w="12700">
+            <a:solidFill>
+              <a:srgbClr val="F7F7F7"/>
+            </a:solidFill>
+            <a:prstDash val="solid"/>
+          </a:ln>
+        </p:spPr>
+      </p:sp>
+      <p:sp>
+        <p:nvSpPr>
+          <p:cNvPr id="15" name="icon-kreis-FaQuestionCircle"/>
+          <p:cNvSpPr/>
+          <p:nvPr/>
+        </p:nvSpPr>
+        <p:spPr>
+          <a:xfrm>
+            <a:off x="8402117" y="3017520"/>
+            <a:ext cx="640080" cy="640080"/>
+          </a:xfrm>
+          <a:prstGeom prst="ellipse">
+            <a:avLst/>
+          </a:prstGeom>
+          <a:solidFill>
+            <a:srgbClr val="006FAD"/>
+          </a:solidFill>
+          <a:ln w="12700">
+            <a:solidFill>
+              <a:srgbClr val="006FAD"/>
+            </a:solidFill>
+            <a:prstDash val="solid"/>
+          </a:ln>
+        </p:spPr>
+      </p:sp>
+      <p:pic>
+        <p:nvPicPr>
+          <p:cNvPr id="16" name="icon-FaQuestionCircle" descr="C:\Users\Thanam\AppData\Local\Temp\claude\c--Projekt-Trainings-azure-basics-training\d01384da-f513-40b3-985e-441cf1c86f9e\scratchpad\arbeit\assets\icons\FaQuestionCircle.png">    </p:cNvPr>
+          <p:cNvPicPr>
+            <a:picLocks noChangeAspect="1"/>
+          </p:cNvPicPr>
+          <p:nvPr/>
+        </p:nvPicPr>
+        <p:blipFill>
+          <a:blip r:embed="rId3"/>
+          <a:stretch>
+            <a:fillRect/>
+          </a:stretch>
+        </p:blipFill>
+        <p:spPr>
+          <a:xfrm>
+            <a:off x="8555736" y="3171139"/>
+            <a:ext cx="332842" cy="332842"/>
+          </a:xfrm>
+          <a:prstGeom prst="rect">
+            <a:avLst/>
+          </a:prstGeom>
+        </p:spPr>
+      </p:pic>
+      <p:sp>
+        <p:nvSpPr>
+          <p:cNvPr id="17" name="Text 12"/>
+          <p:cNvSpPr txBox="1"/>
+          <p:nvPr/>
+        </p:nvSpPr>
+        <p:spPr>
+          <a:xfrm>
+            <a:off x="9225077" y="3017520"/>
+            <a:ext cx="2189378" cy="640080"/>
+          </a:xfrm>
+          <a:prstGeom prst="rect">
+            <a:avLst/>
+          </a:prstGeom>
+          <a:noFill/>
+          <a:ln/>
+        </p:spPr>
+        <p:txBody>
+          <a:bodyPr wrap="square" lIns="0" tIns="0" rIns="0" bIns="0" rtlCol="0" anchor="ctr">
+            <a:normAutofit/>
+          </a:bodyPr>
+          <a:lstStyle/>
           <a:p>
             <a:pPr indent="0" marL="0">
               <a:buNone/>
             </a:pPr>
             <a:r>
-              <a:rPr lang="en-US" sz="1800" dirty="0">
+              <a:rPr lang="en-US" sz="2000" b="1" dirty="0">
                 <a:solidFill>
-                  <a:srgbClr val="6F6F6F"/>
+                  <a:srgbClr val="27303A"/>
                 </a:solidFill>
               </a:rPr>
-              <a:t>Erstellen einer Linux-VM in Azure · Zustände und Abrechnung von VMs</a:t>
+              <a:t>Grösse</a:t>
             </a:r>
-            <a:endParaRPr lang="en-US" sz="1800" dirty="0"/>
+            <a:endParaRPr lang="en-US" sz="2000" dirty="0"/>
+          </a:p>
+        </p:txBody>
+      </p:sp>
+      <p:sp>
+        <p:nvSpPr>
+          <p:cNvPr id="18" name="Text 13"/>
+          <p:cNvSpPr txBox="1"/>
+          <p:nvPr/>
+        </p:nvSpPr>
+        <p:spPr>
+          <a:xfrm>
+            <a:off x="8402117" y="3840480"/>
+            <a:ext cx="2966618" cy="1234440"/>
+          </a:xfrm>
+          <a:prstGeom prst="rect">
+            <a:avLst/>
+          </a:prstGeom>
+          <a:noFill/>
+          <a:ln/>
+        </p:spPr>
+        <p:txBody>
+          <a:bodyPr wrap="square" lIns="0" tIns="0" rIns="0" bIns="0" rtlCol="0" anchor="t"/>
+          <a:lstStyle/>
+          <a:p>
+            <a:pPr indent="0" marL="0">
+              <a:spcAft>
+                <a:spcPts val="400"/>
+              </a:spcAft>
+              <a:buNone/>
+            </a:pPr>
+            <a:r>
+              <a:rPr lang="en-US" sz="1600" dirty="0">
+                <a:solidFill>
+                  <a:srgbClr val="27303A"/>
+                </a:solidFill>
+              </a:rPr>
+              <a:t>Was bedeutet die 2 in Standard_B2s?</a:t>
+            </a:r>
+            <a:endParaRPr lang="en-US" sz="1600" dirty="0"/>
           </a:p>
         </p:txBody>
       </p:sp>
